--- a/Course content/Slides/Topic 1 What is ML.pptx
+++ b/Course content/Slides/Topic 1 What is ML.pptx
@@ -287,7 +287,7 @@
           <a:p>
             <a:fld id="{A7DB5662-7327-465C-9A70-AD96B7A8D67A}" type="datetimeFigureOut">
               <a:rPr lang="en-US" smtClean="0"/>
-              <a:t>9/29/2022</a:t>
+              <a:t>10/18/2022</a:t>
             </a:fld>
             <a:endParaRPr lang="en-US"/>
           </a:p>
@@ -485,7 +485,7 @@
           <a:p>
             <a:fld id="{A7DB5662-7327-465C-9A70-AD96B7A8D67A}" type="datetimeFigureOut">
               <a:rPr lang="en-US" smtClean="0"/>
-              <a:t>9/29/2022</a:t>
+              <a:t>10/18/2022</a:t>
             </a:fld>
             <a:endParaRPr lang="en-US"/>
           </a:p>
@@ -693,7 +693,7 @@
           <a:p>
             <a:fld id="{A7DB5662-7327-465C-9A70-AD96B7A8D67A}" type="datetimeFigureOut">
               <a:rPr lang="en-US" smtClean="0"/>
-              <a:t>9/29/2022</a:t>
+              <a:t>10/18/2022</a:t>
             </a:fld>
             <a:endParaRPr lang="en-US"/>
           </a:p>
@@ -891,7 +891,7 @@
           <a:p>
             <a:fld id="{A7DB5662-7327-465C-9A70-AD96B7A8D67A}" type="datetimeFigureOut">
               <a:rPr lang="en-US" smtClean="0"/>
-              <a:t>9/29/2022</a:t>
+              <a:t>10/18/2022</a:t>
             </a:fld>
             <a:endParaRPr lang="en-US"/>
           </a:p>
@@ -1166,7 +1166,7 @@
           <a:p>
             <a:fld id="{A7DB5662-7327-465C-9A70-AD96B7A8D67A}" type="datetimeFigureOut">
               <a:rPr lang="en-US" smtClean="0"/>
-              <a:t>9/29/2022</a:t>
+              <a:t>10/18/2022</a:t>
             </a:fld>
             <a:endParaRPr lang="en-US"/>
           </a:p>
@@ -1431,7 +1431,7 @@
           <a:p>
             <a:fld id="{A7DB5662-7327-465C-9A70-AD96B7A8D67A}" type="datetimeFigureOut">
               <a:rPr lang="en-US" smtClean="0"/>
-              <a:t>9/29/2022</a:t>
+              <a:t>10/18/2022</a:t>
             </a:fld>
             <a:endParaRPr lang="en-US"/>
           </a:p>
@@ -1843,7 +1843,7 @@
           <a:p>
             <a:fld id="{A7DB5662-7327-465C-9A70-AD96B7A8D67A}" type="datetimeFigureOut">
               <a:rPr lang="en-US" smtClean="0"/>
-              <a:t>9/29/2022</a:t>
+              <a:t>10/18/2022</a:t>
             </a:fld>
             <a:endParaRPr lang="en-US"/>
           </a:p>
@@ -1984,7 +1984,7 @@
           <a:p>
             <a:fld id="{A7DB5662-7327-465C-9A70-AD96B7A8D67A}" type="datetimeFigureOut">
               <a:rPr lang="en-US" smtClean="0"/>
-              <a:t>9/29/2022</a:t>
+              <a:t>10/18/2022</a:t>
             </a:fld>
             <a:endParaRPr lang="en-US"/>
           </a:p>
@@ -2097,7 +2097,7 @@
           <a:p>
             <a:fld id="{A7DB5662-7327-465C-9A70-AD96B7A8D67A}" type="datetimeFigureOut">
               <a:rPr lang="en-US" smtClean="0"/>
-              <a:t>9/29/2022</a:t>
+              <a:t>10/18/2022</a:t>
             </a:fld>
             <a:endParaRPr lang="en-US"/>
           </a:p>
@@ -2408,7 +2408,7 @@
           <a:p>
             <a:fld id="{A7DB5662-7327-465C-9A70-AD96B7A8D67A}" type="datetimeFigureOut">
               <a:rPr lang="en-US" smtClean="0"/>
-              <a:t>9/29/2022</a:t>
+              <a:t>10/18/2022</a:t>
             </a:fld>
             <a:endParaRPr lang="en-US"/>
           </a:p>
@@ -2696,7 +2696,7 @@
           <a:p>
             <a:fld id="{A7DB5662-7327-465C-9A70-AD96B7A8D67A}" type="datetimeFigureOut">
               <a:rPr lang="en-US" smtClean="0"/>
-              <a:t>9/29/2022</a:t>
+              <a:t>10/18/2022</a:t>
             </a:fld>
             <a:endParaRPr lang="en-US"/>
           </a:p>
@@ -2937,7 +2937,7 @@
           <a:p>
             <a:fld id="{A7DB5662-7327-465C-9A70-AD96B7A8D67A}" type="datetimeFigureOut">
               <a:rPr lang="en-US" smtClean="0"/>
-              <a:t>9/29/2022</a:t>
+              <a:t>10/18/2022</a:t>
             </a:fld>
             <a:endParaRPr lang="en-US"/>
           </a:p>
@@ -21363,7 +21363,7 @@
           <a:p>
             <a:pPr>
               <a:lnSpc>
-                <a:spcPct val="100000"/>
+                <a:spcPct val="150000"/>
               </a:lnSpc>
               <a:buFont typeface="Wingdings" panose="05000000000000000000" pitchFamily="2" charset="2"/>
               <a:buChar char="§"/>
@@ -21378,7 +21378,7 @@
           <a:p>
             <a:pPr lvl="1">
               <a:lnSpc>
-                <a:spcPct val="100000"/>
+                <a:spcPct val="150000"/>
               </a:lnSpc>
               <a:buFont typeface="Wingdings" panose="05000000000000000000" pitchFamily="2" charset="2"/>
               <a:buChar char="§"/>
@@ -21393,13 +21393,13 @@
               <a:rPr lang="en-US" sz="2000" dirty="0">
                 <a:latin typeface="+mj-lt"/>
               </a:rPr>
-              <a:t>: The model is trained using this observations</a:t>
+              <a:t>: The model is trained on this observations</a:t>
             </a:r>
           </a:p>
           <a:p>
             <a:pPr lvl="1">
               <a:lnSpc>
-                <a:spcPct val="100000"/>
+                <a:spcPct val="150000"/>
               </a:lnSpc>
               <a:buFont typeface="Wingdings" panose="05000000000000000000" pitchFamily="2" charset="2"/>
               <a:buChar char="§"/>
@@ -21414,13 +21414,13 @@
               <a:rPr lang="en-US" sz="2000" dirty="0">
                 <a:latin typeface="+mj-lt"/>
               </a:rPr>
-              <a:t>: The model is tested in these other observations, which has not seen before</a:t>
+              <a:t>: The model is tested on these other observations, which it has not seen before</a:t>
             </a:r>
           </a:p>
           <a:p>
             <a:pPr>
               <a:lnSpc>
-                <a:spcPct val="100000"/>
+                <a:spcPct val="150000"/>
               </a:lnSpc>
               <a:buFont typeface="Wingdings" panose="05000000000000000000" pitchFamily="2" charset="2"/>
               <a:buChar char="§"/>
@@ -21954,7 +21954,7 @@
         </p:nvSpPr>
         <p:spPr>
           <a:xfrm>
-            <a:off x="2495231" y="5944955"/>
+            <a:off x="2459791" y="5944955"/>
             <a:ext cx="2398734" cy="369332"/>
           </a:xfrm>
           <a:prstGeom prst="rect">
@@ -21992,7 +21992,7 @@
         </p:nvSpPr>
         <p:spPr>
           <a:xfrm>
-            <a:off x="8246764" y="6007585"/>
+            <a:off x="7956147" y="6007585"/>
             <a:ext cx="2398734" cy="369332"/>
           </a:xfrm>
           <a:prstGeom prst="rect">
@@ -22373,7 +22373,7 @@
         </p:blipFill>
         <p:spPr>
           <a:xfrm>
-            <a:off x="1808709" y="3429000"/>
+            <a:off x="1808709" y="3457352"/>
             <a:ext cx="3187337" cy="2549435"/>
           </a:xfrm>
           <a:prstGeom prst="rect">
@@ -22403,7 +22403,7 @@
         </p:blipFill>
         <p:spPr>
           <a:xfrm>
-            <a:off x="7605933" y="3442061"/>
+            <a:off x="7301140" y="3477501"/>
             <a:ext cx="3187337" cy="2540726"/>
           </a:xfrm>
           <a:prstGeom prst="rect">
@@ -22871,7 +22871,7 @@
         <p:spPr>
           <a:xfrm>
             <a:off x="8473859" y="1929007"/>
-            <a:ext cx="3538602" cy="3139321"/>
+            <a:ext cx="3538602" cy="3416320"/>
           </a:xfrm>
           <a:prstGeom prst="rect">
             <a:avLst/>
@@ -22894,26 +22894,23 @@
               <a:rPr lang="en-US" b="1" dirty="0">
                 <a:latin typeface="+mj-lt"/>
               </a:rPr>
-              <a:t>training MSE decrease</a:t>
+              <a:t>training MSE decrease…</a:t>
             </a:r>
             <a:r>
               <a:rPr lang="en-US" dirty="0">
                 <a:latin typeface="+mj-lt"/>
               </a:rPr>
-              <a:t>, but the </a:t>
+              <a:t> but the </a:t>
             </a:r>
             <a:r>
               <a:rPr lang="en-US" b="1" dirty="0">
                 <a:latin typeface="+mj-lt"/>
               </a:rPr>
-              <a:t>test MSE may not</a:t>
-            </a:r>
-            <a:r>
-              <a:rPr lang="en-US" dirty="0">
-                <a:latin typeface="+mj-lt"/>
-              </a:rPr>
-              <a:t>.</a:t>
-            </a:r>
+              <a:t>test MSE may not!</a:t>
+            </a:r>
+            <a:endParaRPr lang="en-US" dirty="0">
+              <a:latin typeface="+mj-lt"/>
+            </a:endParaRPr>
           </a:p>
           <a:p>
             <a:endParaRPr lang="en-US" dirty="0">
@@ -22925,13 +22922,19 @@
               <a:rPr lang="en-US" dirty="0">
                 <a:latin typeface="+mj-lt"/>
               </a:rPr>
-              <a:t>When small training MSE but large test MSE, the model is </a:t>
+              <a:t>When MSE is small in training but large MSE in test, the model is </a:t>
+            </a:r>
+            <a:r>
+              <a:rPr lang="en-US" b="1" i="1" u="sng" dirty="0">
+                <a:latin typeface="+mj-lt"/>
+              </a:rPr>
+              <a:t>overfitting</a:t>
             </a:r>
             <a:r>
               <a:rPr lang="en-US" i="1" dirty="0">
                 <a:latin typeface="+mj-lt"/>
               </a:rPr>
-              <a:t>overfitting.</a:t>
+              <a:t>.</a:t>
             </a:r>
           </a:p>
           <a:p>
@@ -22963,6 +22966,122 @@
                 <a:latin typeface="+mj-lt"/>
               </a:rPr>
               <a:t>There is a trade-off between hitting the nail on the head and generalize results</a:t>
+            </a:r>
+          </a:p>
+        </p:txBody>
+      </p:sp>
+      <p:sp>
+        <p:nvSpPr>
+          <p:cNvPr id="12" name="TextBox 11">
+            <a:extLst>
+              <a:ext uri="{FF2B5EF4-FFF2-40B4-BE49-F238E27FC236}">
+                <a16:creationId xmlns:a16="http://schemas.microsoft.com/office/drawing/2014/main" id="{ED7B3CDE-8B4F-8C89-8FEA-4DE24A8B4509}"/>
+              </a:ext>
+            </a:extLst>
+          </p:cNvPr>
+          <p:cNvSpPr txBox="1"/>
+          <p:nvPr/>
+        </p:nvSpPr>
+        <p:spPr>
+          <a:xfrm>
+            <a:off x="7321090" y="4975995"/>
+            <a:ext cx="985421" cy="369332"/>
+          </a:xfrm>
+          <a:prstGeom prst="rect">
+            <a:avLst/>
+          </a:prstGeom>
+          <a:noFill/>
+        </p:spPr>
+        <p:txBody>
+          <a:bodyPr wrap="square" rtlCol="0">
+            <a:spAutoFit/>
+          </a:bodyPr>
+          <a:lstStyle/>
+          <a:p>
+            <a:pPr algn="ctr"/>
+            <a:r>
+              <a:rPr lang="en-US" dirty="0">
+                <a:solidFill>
+                  <a:schemeClr val="bg1">
+                    <a:lumMod val="50000"/>
+                  </a:schemeClr>
+                </a:solidFill>
+              </a:rPr>
+              <a:t>training</a:t>
+            </a:r>
+          </a:p>
+        </p:txBody>
+      </p:sp>
+      <p:sp>
+        <p:nvSpPr>
+          <p:cNvPr id="16" name="TextBox 15">
+            <a:extLst>
+              <a:ext uri="{FF2B5EF4-FFF2-40B4-BE49-F238E27FC236}">
+                <a16:creationId xmlns:a16="http://schemas.microsoft.com/office/drawing/2014/main" id="{F4A8EB18-B4BF-B5A3-14DF-D02854E467E4}"/>
+              </a:ext>
+            </a:extLst>
+          </p:cNvPr>
+          <p:cNvSpPr txBox="1"/>
+          <p:nvPr/>
+        </p:nvSpPr>
+        <p:spPr>
+          <a:xfrm>
+            <a:off x="7321089" y="2061401"/>
+            <a:ext cx="985421" cy="369332"/>
+          </a:xfrm>
+          <a:prstGeom prst="rect">
+            <a:avLst/>
+          </a:prstGeom>
+          <a:noFill/>
+        </p:spPr>
+        <p:txBody>
+          <a:bodyPr wrap="square" rtlCol="0">
+            <a:spAutoFit/>
+          </a:bodyPr>
+          <a:lstStyle/>
+          <a:p>
+            <a:r>
+              <a:rPr lang="en-US" dirty="0">
+                <a:solidFill>
+                  <a:srgbClr val="C00000"/>
+                </a:solidFill>
+              </a:rPr>
+              <a:t>testing</a:t>
+            </a:r>
+          </a:p>
+        </p:txBody>
+      </p:sp>
+      <p:sp>
+        <p:nvSpPr>
+          <p:cNvPr id="17" name="TextBox 16">
+            <a:extLst>
+              <a:ext uri="{FF2B5EF4-FFF2-40B4-BE49-F238E27FC236}">
+                <a16:creationId xmlns:a16="http://schemas.microsoft.com/office/drawing/2014/main" id="{E5ABE6DD-B491-5DE3-7058-1837AEBD892B}"/>
+              </a:ext>
+            </a:extLst>
+          </p:cNvPr>
+          <p:cNvSpPr txBox="1"/>
+          <p:nvPr/>
+        </p:nvSpPr>
+        <p:spPr>
+          <a:xfrm>
+            <a:off x="3902452" y="6068955"/>
+            <a:ext cx="2107949" cy="276999"/>
+          </a:xfrm>
+          <a:prstGeom prst="rect">
+            <a:avLst/>
+          </a:prstGeom>
+          <a:noFill/>
+        </p:spPr>
+        <p:txBody>
+          <a:bodyPr wrap="square" rtlCol="0">
+            <a:spAutoFit/>
+          </a:bodyPr>
+          <a:lstStyle/>
+          <a:p>
+            <a:r>
+              <a:rPr lang="en-US" sz="1200" dirty="0"/>
+              <a:t>Source: James, G. et al. (2019)</a:t>
             </a:r>
           </a:p>
         </p:txBody>
@@ -25562,6 +25681,333 @@
   <p:clrMapOvr>
     <a:masterClrMapping/>
   </p:clrMapOvr>
+  <p:timing>
+    <p:tnLst>
+      <p:par>
+        <p:cTn id="1" dur="indefinite" restart="never" nodeType="tmRoot">
+          <p:childTnLst>
+            <p:seq concurrent="1" nextAc="seek">
+              <p:cTn id="2" dur="indefinite" nodeType="mainSeq">
+                <p:childTnLst>
+                  <p:par>
+                    <p:cTn id="3" fill="hold">
+                      <p:stCondLst>
+                        <p:cond delay="indefinite"/>
+                      </p:stCondLst>
+                      <p:childTnLst>
+                        <p:par>
+                          <p:cTn id="4" fill="hold">
+                            <p:stCondLst>
+                              <p:cond delay="0"/>
+                            </p:stCondLst>
+                            <p:childTnLst>
+                              <p:par>
+                                <p:cTn id="5" presetID="1" presetClass="entr" presetSubtype="0" fill="hold" grpId="0" nodeType="clickEffect">
+                                  <p:stCondLst>
+                                    <p:cond delay="0"/>
+                                  </p:stCondLst>
+                                  <p:childTnLst>
+                                    <p:set>
+                                      <p:cBhvr>
+                                        <p:cTn id="6" dur="1" fill="hold">
+                                          <p:stCondLst>
+                                            <p:cond delay="0"/>
+                                          </p:stCondLst>
+                                        </p:cTn>
+                                        <p:tgtEl>
+                                          <p:spTgt spid="3">
+                                            <p:txEl>
+                                              <p:pRg st="0" end="0"/>
+                                            </p:txEl>
+                                          </p:spTgt>
+                                        </p:tgtEl>
+                                        <p:attrNameLst>
+                                          <p:attrName>style.visibility</p:attrName>
+                                        </p:attrNameLst>
+                                      </p:cBhvr>
+                                      <p:to>
+                                        <p:strVal val="visible"/>
+                                      </p:to>
+                                    </p:set>
+                                  </p:childTnLst>
+                                </p:cTn>
+                              </p:par>
+                            </p:childTnLst>
+                          </p:cTn>
+                        </p:par>
+                      </p:childTnLst>
+                    </p:cTn>
+                  </p:par>
+                  <p:par>
+                    <p:cTn id="7" fill="hold">
+                      <p:stCondLst>
+                        <p:cond delay="indefinite"/>
+                      </p:stCondLst>
+                      <p:childTnLst>
+                        <p:par>
+                          <p:cTn id="8" fill="hold">
+                            <p:stCondLst>
+                              <p:cond delay="0"/>
+                            </p:stCondLst>
+                            <p:childTnLst>
+                              <p:par>
+                                <p:cTn id="9" presetID="1" presetClass="entr" presetSubtype="0" fill="hold" grpId="0" nodeType="clickEffect">
+                                  <p:stCondLst>
+                                    <p:cond delay="0"/>
+                                  </p:stCondLst>
+                                  <p:childTnLst>
+                                    <p:set>
+                                      <p:cBhvr>
+                                        <p:cTn id="10" dur="1" fill="hold">
+                                          <p:stCondLst>
+                                            <p:cond delay="0"/>
+                                          </p:stCondLst>
+                                        </p:cTn>
+                                        <p:tgtEl>
+                                          <p:spTgt spid="3">
+                                            <p:txEl>
+                                              <p:pRg st="1" end="1"/>
+                                            </p:txEl>
+                                          </p:spTgt>
+                                        </p:tgtEl>
+                                        <p:attrNameLst>
+                                          <p:attrName>style.visibility</p:attrName>
+                                        </p:attrNameLst>
+                                      </p:cBhvr>
+                                      <p:to>
+                                        <p:strVal val="visible"/>
+                                      </p:to>
+                                    </p:set>
+                                  </p:childTnLst>
+                                </p:cTn>
+                              </p:par>
+                            </p:childTnLst>
+                          </p:cTn>
+                        </p:par>
+                      </p:childTnLst>
+                    </p:cTn>
+                  </p:par>
+                  <p:par>
+                    <p:cTn id="11" fill="hold">
+                      <p:stCondLst>
+                        <p:cond delay="indefinite"/>
+                      </p:stCondLst>
+                      <p:childTnLst>
+                        <p:par>
+                          <p:cTn id="12" fill="hold">
+                            <p:stCondLst>
+                              <p:cond delay="0"/>
+                            </p:stCondLst>
+                            <p:childTnLst>
+                              <p:par>
+                                <p:cTn id="13" presetID="1" presetClass="entr" presetSubtype="0" fill="hold" grpId="0" nodeType="clickEffect">
+                                  <p:stCondLst>
+                                    <p:cond delay="0"/>
+                                  </p:stCondLst>
+                                  <p:childTnLst>
+                                    <p:set>
+                                      <p:cBhvr>
+                                        <p:cTn id="14" dur="1" fill="hold">
+                                          <p:stCondLst>
+                                            <p:cond delay="0"/>
+                                          </p:stCondLst>
+                                        </p:cTn>
+                                        <p:tgtEl>
+                                          <p:spTgt spid="3">
+                                            <p:txEl>
+                                              <p:pRg st="2" end="2"/>
+                                            </p:txEl>
+                                          </p:spTgt>
+                                        </p:tgtEl>
+                                        <p:attrNameLst>
+                                          <p:attrName>style.visibility</p:attrName>
+                                        </p:attrNameLst>
+                                      </p:cBhvr>
+                                      <p:to>
+                                        <p:strVal val="visible"/>
+                                      </p:to>
+                                    </p:set>
+                                  </p:childTnLst>
+                                </p:cTn>
+                              </p:par>
+                            </p:childTnLst>
+                          </p:cTn>
+                        </p:par>
+                      </p:childTnLst>
+                    </p:cTn>
+                  </p:par>
+                  <p:par>
+                    <p:cTn id="15" fill="hold">
+                      <p:stCondLst>
+                        <p:cond delay="indefinite"/>
+                      </p:stCondLst>
+                      <p:childTnLst>
+                        <p:par>
+                          <p:cTn id="16" fill="hold">
+                            <p:stCondLst>
+                              <p:cond delay="0"/>
+                            </p:stCondLst>
+                            <p:childTnLst>
+                              <p:par>
+                                <p:cTn id="17" presetID="1" presetClass="entr" presetSubtype="0" fill="hold" grpId="0" nodeType="clickEffect">
+                                  <p:stCondLst>
+                                    <p:cond delay="0"/>
+                                  </p:stCondLst>
+                                  <p:childTnLst>
+                                    <p:set>
+                                      <p:cBhvr>
+                                        <p:cTn id="18" dur="1" fill="hold">
+                                          <p:stCondLst>
+                                            <p:cond delay="0"/>
+                                          </p:stCondLst>
+                                        </p:cTn>
+                                        <p:tgtEl>
+                                          <p:spTgt spid="3">
+                                            <p:txEl>
+                                              <p:pRg st="3" end="3"/>
+                                            </p:txEl>
+                                          </p:spTgt>
+                                        </p:tgtEl>
+                                        <p:attrNameLst>
+                                          <p:attrName>style.visibility</p:attrName>
+                                        </p:attrNameLst>
+                                      </p:cBhvr>
+                                      <p:to>
+                                        <p:strVal val="visible"/>
+                                      </p:to>
+                                    </p:set>
+                                  </p:childTnLst>
+                                </p:cTn>
+                              </p:par>
+                            </p:childTnLst>
+                          </p:cTn>
+                        </p:par>
+                      </p:childTnLst>
+                    </p:cTn>
+                  </p:par>
+                  <p:par>
+                    <p:cTn id="19" fill="hold">
+                      <p:stCondLst>
+                        <p:cond delay="indefinite"/>
+                      </p:stCondLst>
+                      <p:childTnLst>
+                        <p:par>
+                          <p:cTn id="20" fill="hold">
+                            <p:stCondLst>
+                              <p:cond delay="0"/>
+                            </p:stCondLst>
+                            <p:childTnLst>
+                              <p:par>
+                                <p:cTn id="21" presetID="1" presetClass="entr" presetSubtype="0" fill="hold" grpId="0" nodeType="clickEffect">
+                                  <p:stCondLst>
+                                    <p:cond delay="0"/>
+                                  </p:stCondLst>
+                                  <p:childTnLst>
+                                    <p:set>
+                                      <p:cBhvr>
+                                        <p:cTn id="22" dur="1" fill="hold">
+                                          <p:stCondLst>
+                                            <p:cond delay="0"/>
+                                          </p:stCondLst>
+                                        </p:cTn>
+                                        <p:tgtEl>
+                                          <p:spTgt spid="3">
+                                            <p:txEl>
+                                              <p:pRg st="4" end="4"/>
+                                            </p:txEl>
+                                          </p:spTgt>
+                                        </p:tgtEl>
+                                        <p:attrNameLst>
+                                          <p:attrName>style.visibility</p:attrName>
+                                        </p:attrNameLst>
+                                      </p:cBhvr>
+                                      <p:to>
+                                        <p:strVal val="visible"/>
+                                      </p:to>
+                                    </p:set>
+                                  </p:childTnLst>
+                                </p:cTn>
+                              </p:par>
+                            </p:childTnLst>
+                          </p:cTn>
+                        </p:par>
+                      </p:childTnLst>
+                    </p:cTn>
+                  </p:par>
+                  <p:par>
+                    <p:cTn id="23" fill="hold">
+                      <p:stCondLst>
+                        <p:cond delay="indefinite"/>
+                      </p:stCondLst>
+                      <p:childTnLst>
+                        <p:par>
+                          <p:cTn id="24" fill="hold">
+                            <p:stCondLst>
+                              <p:cond delay="0"/>
+                            </p:stCondLst>
+                            <p:childTnLst>
+                              <p:par>
+                                <p:cTn id="25" presetID="1" presetClass="entr" presetSubtype="0" fill="hold" grpId="0" nodeType="clickEffect">
+                                  <p:stCondLst>
+                                    <p:cond delay="0"/>
+                                  </p:stCondLst>
+                                  <p:childTnLst>
+                                    <p:set>
+                                      <p:cBhvr>
+                                        <p:cTn id="26" dur="1" fill="hold">
+                                          <p:stCondLst>
+                                            <p:cond delay="0"/>
+                                          </p:stCondLst>
+                                        </p:cTn>
+                                        <p:tgtEl>
+                                          <p:spTgt spid="3">
+                                            <p:txEl>
+                                              <p:pRg st="5" end="5"/>
+                                            </p:txEl>
+                                          </p:spTgt>
+                                        </p:tgtEl>
+                                        <p:attrNameLst>
+                                          <p:attrName>style.visibility</p:attrName>
+                                        </p:attrNameLst>
+                                      </p:cBhvr>
+                                      <p:to>
+                                        <p:strVal val="visible"/>
+                                      </p:to>
+                                    </p:set>
+                                  </p:childTnLst>
+                                </p:cTn>
+                              </p:par>
+                            </p:childTnLst>
+                          </p:cTn>
+                        </p:par>
+                      </p:childTnLst>
+                    </p:cTn>
+                  </p:par>
+                </p:childTnLst>
+              </p:cTn>
+              <p:prevCondLst>
+                <p:cond evt="onPrev" delay="0">
+                  <p:tgtEl>
+                    <p:sldTgt/>
+                  </p:tgtEl>
+                </p:cond>
+              </p:prevCondLst>
+              <p:nextCondLst>
+                <p:cond evt="onNext" delay="0">
+                  <p:tgtEl>
+                    <p:sldTgt/>
+                  </p:tgtEl>
+                </p:cond>
+              </p:nextCondLst>
+            </p:seq>
+          </p:childTnLst>
+        </p:cTn>
+      </p:par>
+    </p:tnLst>
+    <p:bldLst>
+      <p:bldP spid="3" grpId="0" build="p"/>
+    </p:bldLst>
+  </p:timing>
 </p:sld>
 </file>
 
@@ -26291,7 +26737,7 @@
         </p:spPr>
         <p:txBody>
           <a:bodyPr vert="horz" lIns="91440" tIns="45720" rIns="91440" bIns="45720" rtlCol="0">
-            <a:normAutofit/>
+            <a:normAutofit fontScale="70000" lnSpcReduction="20000"/>
           </a:bodyPr>
           <a:lstStyle>
             <a:lvl1pPr marL="0" indent="0" algn="ctr" defTabSz="914400" rtl="0" eaLnBrk="1" latinLnBrk="0" hangingPunct="1">
@@ -26459,6 +26905,9 @@
           </a:lstStyle>
           <a:p>
             <a:pPr marL="457200" indent="-457200" algn="l">
+              <a:lnSpc>
+                <a:spcPct val="150000"/>
+              </a:lnSpc>
               <a:buFont typeface="Wingdings" panose="05000000000000000000" pitchFamily="2" charset="2"/>
               <a:buChar char="§"/>
             </a:pPr>
@@ -26472,6 +26921,9 @@
           </a:p>
           <a:p>
             <a:pPr marL="457200" indent="-457200" algn="l">
+              <a:lnSpc>
+                <a:spcPct val="150000"/>
+              </a:lnSpc>
               <a:buFont typeface="Wingdings" panose="05000000000000000000" pitchFamily="2" charset="2"/>
               <a:buChar char="§"/>
             </a:pPr>
@@ -26485,6 +26937,9 @@
           </a:p>
           <a:p>
             <a:pPr marL="457200" indent="-457200" algn="l">
+              <a:lnSpc>
+                <a:spcPct val="150000"/>
+              </a:lnSpc>
               <a:buFont typeface="Wingdings" panose="05000000000000000000" pitchFamily="2" charset="2"/>
               <a:buChar char="§"/>
             </a:pPr>
@@ -26498,6 +26953,9 @@
           </a:p>
           <a:p>
             <a:pPr marL="457200" indent="-457200" algn="l">
+              <a:lnSpc>
+                <a:spcPct val="150000"/>
+              </a:lnSpc>
               <a:buFont typeface="Wingdings" panose="05000000000000000000" pitchFamily="2" charset="2"/>
               <a:buChar char="§"/>
             </a:pPr>
@@ -26511,6 +26969,9 @@
           </a:p>
           <a:p>
             <a:pPr marL="457200" indent="-457200" algn="l">
+              <a:lnSpc>
+                <a:spcPct val="150000"/>
+              </a:lnSpc>
               <a:buFont typeface="Wingdings" panose="05000000000000000000" pitchFamily="2" charset="2"/>
               <a:buChar char="§"/>
             </a:pPr>
@@ -26524,6 +26985,9 @@
           </a:p>
           <a:p>
             <a:pPr marL="457200" indent="-457200" algn="l">
+              <a:lnSpc>
+                <a:spcPct val="150000"/>
+              </a:lnSpc>
               <a:buFont typeface="Wingdings" panose="05000000000000000000" pitchFamily="2" charset="2"/>
               <a:buChar char="§"/>
             </a:pPr>
@@ -26537,6 +27001,9 @@
           </a:p>
           <a:p>
             <a:pPr marL="457200" indent="-457200" algn="l">
+              <a:lnSpc>
+                <a:spcPct val="150000"/>
+              </a:lnSpc>
               <a:buFont typeface="Wingdings" panose="05000000000000000000" pitchFamily="2" charset="2"/>
               <a:buChar char="§"/>
             </a:pPr>
@@ -26550,6 +27017,9 @@
           </a:p>
           <a:p>
             <a:pPr marL="457200" indent="-457200" algn="l">
+              <a:lnSpc>
+                <a:spcPct val="150000"/>
+              </a:lnSpc>
               <a:buFont typeface="Wingdings" panose="05000000000000000000" pitchFamily="2" charset="2"/>
               <a:buChar char="§"/>
             </a:pPr>
@@ -26986,13 +27456,13 @@
         <p:spPr/>
         <p:txBody>
           <a:bodyPr>
-            <a:normAutofit/>
+            <a:normAutofit fontScale="92500" lnSpcReduction="20000"/>
           </a:bodyPr>
           <a:lstStyle/>
           <a:p>
             <a:pPr marL="514350" indent="-514350">
               <a:lnSpc>
-                <a:spcPct val="100000"/>
+                <a:spcPct val="150000"/>
               </a:lnSpc>
               <a:buFont typeface="+mj-lt"/>
               <a:buAutoNum type="arabicPeriod"/>
@@ -27007,7 +27477,7 @@
           <a:p>
             <a:pPr marL="514350" indent="-514350">
               <a:lnSpc>
-                <a:spcPct val="100000"/>
+                <a:spcPct val="150000"/>
               </a:lnSpc>
               <a:buFont typeface="+mj-lt"/>
               <a:buAutoNum type="arabicPeriod"/>
@@ -27022,7 +27492,7 @@
           <a:p>
             <a:pPr marL="514350" indent="-514350">
               <a:lnSpc>
-                <a:spcPct val="100000"/>
+                <a:spcPct val="150000"/>
               </a:lnSpc>
               <a:buFont typeface="+mj-lt"/>
               <a:buAutoNum type="arabicPeriod"/>
@@ -27037,7 +27507,7 @@
           <a:p>
             <a:pPr marL="514350" indent="-514350">
               <a:lnSpc>
-                <a:spcPct val="100000"/>
+                <a:spcPct val="150000"/>
               </a:lnSpc>
               <a:buFont typeface="+mj-lt"/>
               <a:buAutoNum type="arabicPeriod"/>
@@ -27046,13 +27516,13 @@
               <a:rPr lang="en-US" sz="2400" dirty="0">
                 <a:latin typeface="+mj-lt"/>
               </a:rPr>
-              <a:t>What are the most common supervised tasks?</a:t>
+              <a:t>Can you name four common supervised tasks?</a:t>
             </a:r>
           </a:p>
           <a:p>
             <a:pPr marL="514350" indent="-514350">
               <a:lnSpc>
-                <a:spcPct val="100000"/>
+                <a:spcPct val="150000"/>
               </a:lnSpc>
               <a:buFont typeface="+mj-lt"/>
               <a:buAutoNum type="arabicPeriod"/>
@@ -27061,13 +27531,13 @@
               <a:rPr lang="en-US" sz="2400" dirty="0">
                 <a:latin typeface="+mj-lt"/>
               </a:rPr>
-              <a:t>Can you name four common supervised tasks?</a:t>
+              <a:t>What type of ML algorithm you would use to allow a robot walk in various unknown terrains?</a:t>
             </a:r>
           </a:p>
           <a:p>
             <a:pPr marL="514350" indent="-514350">
               <a:lnSpc>
-                <a:spcPct val="100000"/>
+                <a:spcPct val="150000"/>
               </a:lnSpc>
               <a:buFont typeface="+mj-lt"/>
               <a:buAutoNum type="arabicPeriod"/>
@@ -27076,28 +27546,13 @@
               <a:rPr lang="en-US" sz="2400" dirty="0">
                 <a:latin typeface="+mj-lt"/>
               </a:rPr>
-              <a:t>What type of ML algorithm you would use to allow a robot walk in various unknown terrains?</a:t>
+              <a:t>What type of ML algorithm you would use to segment your customers into multiple groups?</a:t>
             </a:r>
           </a:p>
           <a:p>
             <a:pPr marL="514350" indent="-514350">
               <a:lnSpc>
-                <a:spcPct val="100000"/>
-              </a:lnSpc>
-              <a:buFont typeface="+mj-lt"/>
-              <a:buAutoNum type="arabicPeriod"/>
-            </a:pPr>
-            <a:r>
-              <a:rPr lang="en-US" sz="2400" dirty="0">
-                <a:latin typeface="+mj-lt"/>
-              </a:rPr>
-              <a:t>What type of ML algorithm you would use to segment your customers into multiple groups?</a:t>
-            </a:r>
-          </a:p>
-          <a:p>
-            <a:pPr marL="514350" indent="-514350">
-              <a:lnSpc>
-                <a:spcPct val="100000"/>
+                <a:spcPct val="150000"/>
               </a:lnSpc>
               <a:buFont typeface="+mj-lt"/>
               <a:buAutoNum type="arabicPeriod"/>
@@ -27522,16 +27977,16 @@
         <p:spPr/>
         <p:txBody>
           <a:bodyPr>
-            <a:normAutofit/>
+            <a:normAutofit fontScale="92500" lnSpcReduction="20000"/>
           </a:bodyPr>
           <a:lstStyle/>
           <a:p>
             <a:pPr marL="514350" indent="-514350">
               <a:lnSpc>
-                <a:spcPct val="100000"/>
+                <a:spcPct val="150000"/>
               </a:lnSpc>
               <a:buFont typeface="+mj-lt"/>
-              <a:buAutoNum type="arabicPeriod" startAt="8"/>
+              <a:buAutoNum type="arabicPeriod" startAt="7"/>
             </a:pPr>
             <a:r>
               <a:rPr lang="en-US" sz="2400" dirty="0">
@@ -27543,85 +27998,70 @@
           <a:p>
             <a:pPr marL="514350" indent="-514350">
               <a:lnSpc>
-                <a:spcPct val="100000"/>
+                <a:spcPct val="150000"/>
               </a:lnSpc>
               <a:buFont typeface="+mj-lt"/>
-              <a:buAutoNum type="arabicPeriod" startAt="8"/>
+              <a:buAutoNum type="arabicPeriod" startAt="7"/>
             </a:pPr>
             <a:r>
               <a:rPr lang="en-US" sz="2400" dirty="0">
                 <a:latin typeface="+mj-lt"/>
               </a:rPr>
-              <a:t>What is an online learning system?</a:t>
+              <a:t>What is the difference between a model parameter and a learning algorithm’s hyperparameter?</a:t>
             </a:r>
           </a:p>
           <a:p>
             <a:pPr marL="514350" indent="-514350">
               <a:lnSpc>
-                <a:spcPct val="100000"/>
+                <a:spcPct val="150000"/>
               </a:lnSpc>
               <a:buFont typeface="+mj-lt"/>
-              <a:buAutoNum type="arabicPeriod" startAt="8"/>
+              <a:buAutoNum type="arabicPeriod" startAt="7"/>
             </a:pPr>
             <a:r>
               <a:rPr lang="en-US" sz="2400" dirty="0">
                 <a:latin typeface="+mj-lt"/>
               </a:rPr>
-              <a:t>What is the difference between a model parameter and a learning algorithm’s hyperparameter?</a:t>
+              <a:t>Can you name four of the main challenges in Machine Learning?</a:t>
             </a:r>
           </a:p>
           <a:p>
             <a:pPr marL="514350" indent="-514350">
               <a:lnSpc>
-                <a:spcPct val="100000"/>
+                <a:spcPct val="150000"/>
               </a:lnSpc>
               <a:buFont typeface="+mj-lt"/>
-              <a:buAutoNum type="arabicPeriod" startAt="8"/>
+              <a:buAutoNum type="arabicPeriod" startAt="7"/>
             </a:pPr>
             <a:r>
               <a:rPr lang="en-US" sz="2400" dirty="0">
                 <a:latin typeface="+mj-lt"/>
               </a:rPr>
-              <a:t>Can you name four of the main challenges in Machine Learning?</a:t>
+              <a:t>If your model performs great on the training data but generalizes poorly to new instances, what is happening?</a:t>
             </a:r>
           </a:p>
           <a:p>
             <a:pPr marL="514350" indent="-514350">
               <a:lnSpc>
-                <a:spcPct val="100000"/>
+                <a:spcPct val="150000"/>
               </a:lnSpc>
               <a:buFont typeface="+mj-lt"/>
-              <a:buAutoNum type="arabicPeriod" startAt="8"/>
+              <a:buAutoNum type="arabicPeriod" startAt="7"/>
             </a:pPr>
             <a:r>
               <a:rPr lang="en-US" sz="2400" dirty="0">
                 <a:latin typeface="+mj-lt"/>
               </a:rPr>
-              <a:t>If your model performs great on the training data but generalizes poorly to new instances, what is happening?</a:t>
+              <a:t>What is a test set?</a:t>
             </a:r>
           </a:p>
           <a:p>
             <a:pPr marL="514350" indent="-514350">
               <a:lnSpc>
-                <a:spcPct val="100000"/>
+                <a:spcPct val="150000"/>
               </a:lnSpc>
               <a:buFont typeface="+mj-lt"/>
-              <a:buAutoNum type="arabicPeriod" startAt="8"/>
-            </a:pPr>
-            <a:r>
-              <a:rPr lang="en-US" sz="2400" dirty="0">
-                <a:latin typeface="+mj-lt"/>
-              </a:rPr>
-              <a:t>What is a test set?</a:t>
-            </a:r>
-          </a:p>
-          <a:p>
-            <a:pPr marL="514350" indent="-514350">
-              <a:lnSpc>
-                <a:spcPct val="100000"/>
-              </a:lnSpc>
-              <a:buFont typeface="+mj-lt"/>
-              <a:buAutoNum type="arabicPeriod" startAt="8"/>
+              <a:buAutoNum type="arabicPeriod" startAt="7"/>
             </a:pPr>
             <a:endParaRPr lang="en-US" sz="2400" dirty="0">
               <a:latin typeface="+mj-lt"/>
@@ -28052,19 +28492,19 @@
         <p:spPr/>
         <p:txBody>
           <a:bodyPr>
-            <a:normAutofit/>
+            <a:normAutofit fontScale="92500" lnSpcReduction="10000"/>
           </a:bodyPr>
           <a:lstStyle/>
           <a:p>
             <a:pPr>
               <a:lnSpc>
-                <a:spcPct val="100000"/>
+                <a:spcPct val="150000"/>
               </a:lnSpc>
               <a:buFont typeface="Wingdings" panose="05000000000000000000" pitchFamily="2" charset="2"/>
               <a:buChar char="§"/>
             </a:pPr>
             <a:r>
-              <a:rPr lang="en-US" dirty="0">
+              <a:rPr lang="en-US" sz="2400" dirty="0">
                 <a:latin typeface="+mj-lt"/>
               </a:rPr>
               <a:t>Artificial intelligence (AI) is the general concept that machines can carry out tasks usually performed by humans, or the general idea that machines can behave like humans. </a:t>
@@ -28073,25 +28513,37 @@
           <a:p>
             <a:pPr>
               <a:lnSpc>
-                <a:spcPct val="100000"/>
+                <a:spcPct val="150000"/>
               </a:lnSpc>
               <a:buFont typeface="Wingdings" panose="05000000000000000000" pitchFamily="2" charset="2"/>
               <a:buChar char="§"/>
             </a:pPr>
             <a:r>
-              <a:rPr lang="en-US" dirty="0">
+              <a:rPr lang="en-US" sz="2400" dirty="0">
                 <a:latin typeface="+mj-lt"/>
               </a:rPr>
-              <a:t>Machine Learning (ML) comprises the specific processes by which </a:t>
-            </a:r>
-            <a:r>
-              <a:rPr lang="en-US" b="1" dirty="0">
+              <a:t>Machine Learning (ML) comprises the </a:t>
+            </a:r>
+            <a:r>
+              <a:rPr lang="en-US" sz="2400" b="1" dirty="0">
+                <a:latin typeface="+mj-lt"/>
+              </a:rPr>
+              <a:t>specific processes </a:t>
+            </a:r>
+            <a:r>
+              <a:rPr lang="en-US" sz="2400" dirty="0">
+                <a:latin typeface="+mj-lt"/>
+              </a:rPr>
+              <a:t>by which </a:t>
+            </a:r>
+            <a:r>
+              <a:rPr lang="en-US" sz="2400" b="1" dirty="0">
                 <a:latin typeface="+mj-lt"/>
               </a:rPr>
               <a:t>a machine can learn from data</a:t>
             </a:r>
             <a:r>
-              <a:rPr lang="en-US" dirty="0">
+              <a:rPr lang="en-US" sz="2400" dirty="0">
                 <a:latin typeface="+mj-lt"/>
               </a:rPr>
               <a:t>.</a:t>
@@ -28100,46 +28552,58 @@
           <a:p>
             <a:pPr>
               <a:lnSpc>
-                <a:spcPct val="100000"/>
+                <a:spcPct val="150000"/>
               </a:lnSpc>
               <a:buFont typeface="Wingdings" panose="05000000000000000000" pitchFamily="2" charset="2"/>
               <a:buChar char="§"/>
             </a:pPr>
             <a:r>
-              <a:rPr lang="en-US" dirty="0">
+              <a:rPr lang="en-US" sz="2400" dirty="0">
                 <a:latin typeface="+mj-lt"/>
               </a:rPr>
-              <a:t>This is a </a:t>
-            </a:r>
-            <a:r>
-              <a:rPr lang="en-US" b="1" dirty="0">
+              <a:t>Learning from data is actually a </a:t>
+            </a:r>
+            <a:r>
+              <a:rPr lang="en-US" sz="2400" b="1" dirty="0">
                 <a:latin typeface="+mj-lt"/>
               </a:rPr>
               <a:t>statistical learning</a:t>
             </a:r>
             <a:r>
-              <a:rPr lang="en-US" dirty="0">
+              <a:rPr lang="en-US" sz="2400" dirty="0">
                 <a:latin typeface="+mj-lt"/>
               </a:rPr>
-              <a:t>, in opposition to learning based on rules.</a:t>
-            </a:r>
-            <a:endParaRPr lang="en-US" b="1" dirty="0">
+              <a:t>, in opposition to a learning based on rules.</a:t>
+            </a:r>
+            <a:endParaRPr lang="en-US" sz="2400" b="1" dirty="0">
               <a:latin typeface="+mj-lt"/>
             </a:endParaRPr>
           </a:p>
           <a:p>
             <a:pPr>
               <a:lnSpc>
-                <a:spcPct val="100000"/>
+                <a:spcPct val="150000"/>
               </a:lnSpc>
               <a:buFont typeface="Wingdings" panose="05000000000000000000" pitchFamily="2" charset="2"/>
               <a:buChar char="§"/>
             </a:pPr>
             <a:r>
-              <a:rPr lang="en-US" dirty="0">
+              <a:rPr lang="en-US" sz="2400" dirty="0">
                 <a:latin typeface="+mj-lt"/>
               </a:rPr>
-              <a:t>The ML tools are usually called algorithms, and their approach is different from traditional models (parametric vs non-parametric).</a:t>
+              <a:t>ML tools are usually called algorithms, and their approach is different from traditional models (</a:t>
+            </a:r>
+            <a:r>
+              <a:rPr lang="en-US" sz="2400" b="1" dirty="0">
+                <a:latin typeface="+mj-lt"/>
+              </a:rPr>
+              <a:t>parametric vs non-parametric</a:t>
+            </a:r>
+            <a:r>
+              <a:rPr lang="en-US" sz="2400" dirty="0">
+                <a:latin typeface="+mj-lt"/>
+              </a:rPr>
+              <a:t>).</a:t>
             </a:r>
           </a:p>
         </p:txBody>
@@ -28534,7 +28998,7 @@
           <a:p>
             <a:r>
               <a:rPr lang="en-US" sz="4000" dirty="0"/>
-              <a:t>W&amp;W: Parametric Vs non-parametric models</a:t>
+              <a:t>W&amp;W - Parametric Vs non-parametric models</a:t>
             </a:r>
           </a:p>
         </p:txBody>
@@ -29068,13 +29532,13 @@
         <p:spPr/>
         <p:txBody>
           <a:bodyPr>
-            <a:normAutofit/>
+            <a:normAutofit lnSpcReduction="10000"/>
           </a:bodyPr>
           <a:lstStyle/>
           <a:p>
             <a:pPr>
               <a:lnSpc>
-                <a:spcPct val="100000"/>
+                <a:spcPct val="150000"/>
               </a:lnSpc>
               <a:buFont typeface="Wingdings" panose="05000000000000000000" pitchFamily="2" charset="2"/>
               <a:buChar char="§"/>
@@ -29089,7 +29553,7 @@
           <a:p>
             <a:pPr>
               <a:lnSpc>
-                <a:spcPct val="100000"/>
+                <a:spcPct val="150000"/>
               </a:lnSpc>
               <a:buFont typeface="Wingdings" panose="05000000000000000000" pitchFamily="2" charset="2"/>
               <a:buChar char="§"/>
@@ -29104,7 +29568,7 @@
           <a:p>
             <a:pPr>
               <a:lnSpc>
-                <a:spcPct val="100000"/>
+                <a:spcPct val="150000"/>
               </a:lnSpc>
               <a:buFont typeface="Wingdings" panose="05000000000000000000" pitchFamily="2" charset="2"/>
               <a:buChar char="§"/>
@@ -29119,7 +29583,7 @@
           <a:p>
             <a:pPr>
               <a:lnSpc>
-                <a:spcPct val="100000"/>
+                <a:spcPct val="150000"/>
               </a:lnSpc>
               <a:buFont typeface="Wingdings" panose="05000000000000000000" pitchFamily="2" charset="2"/>
               <a:buChar char="§"/>
@@ -29134,7 +29598,7 @@
           <a:p>
             <a:pPr>
               <a:lnSpc>
-                <a:spcPct val="100000"/>
+                <a:spcPct val="150000"/>
               </a:lnSpc>
               <a:buFont typeface="Wingdings" panose="05000000000000000000" pitchFamily="2" charset="2"/>
               <a:buChar char="§"/>
@@ -29583,13 +30047,13 @@
         <p:spPr/>
         <p:txBody>
           <a:bodyPr>
-            <a:normAutofit/>
+            <a:normAutofit lnSpcReduction="10000"/>
           </a:bodyPr>
           <a:lstStyle/>
           <a:p>
             <a:pPr>
               <a:lnSpc>
-                <a:spcPct val="100000"/>
+                <a:spcPct val="150000"/>
               </a:lnSpc>
               <a:buFont typeface="Wingdings" panose="05000000000000000000" pitchFamily="2" charset="2"/>
               <a:buChar char="§"/>
@@ -29610,7 +30074,7 @@
           <a:p>
             <a:pPr lvl="1">
               <a:lnSpc>
-                <a:spcPct val="100000"/>
+                <a:spcPct val="150000"/>
               </a:lnSpc>
               <a:buFont typeface="Wingdings" panose="05000000000000000000" pitchFamily="2" charset="2"/>
               <a:buChar char="§"/>
@@ -29631,7 +30095,7 @@
           <a:p>
             <a:pPr lvl="1">
               <a:lnSpc>
-                <a:spcPct val="100000"/>
+                <a:spcPct val="150000"/>
               </a:lnSpc>
               <a:buFont typeface="Wingdings" panose="05000000000000000000" pitchFamily="2" charset="2"/>
               <a:buChar char="§"/>
@@ -29652,7 +30116,7 @@
           <a:p>
             <a:pPr lvl="1">
               <a:lnSpc>
-                <a:spcPct val="100000"/>
+                <a:spcPct val="150000"/>
               </a:lnSpc>
               <a:buFont typeface="Wingdings" panose="05000000000000000000" pitchFamily="2" charset="2"/>
               <a:buChar char="§"/>
@@ -29667,7 +30131,7 @@
           <a:p>
             <a:pPr lvl="1">
               <a:lnSpc>
-                <a:spcPct val="100000"/>
+                <a:spcPct val="150000"/>
               </a:lnSpc>
               <a:buFont typeface="Wingdings" panose="05000000000000000000" pitchFamily="2" charset="2"/>
               <a:buChar char="§"/>
@@ -29682,7 +30146,7 @@
           <a:p>
             <a:pPr>
               <a:lnSpc>
-                <a:spcPct val="100000"/>
+                <a:spcPct val="150000"/>
               </a:lnSpc>
               <a:buFont typeface="Wingdings" panose="05000000000000000000" pitchFamily="2" charset="2"/>
               <a:buChar char="§"/>
@@ -29697,7 +30161,7 @@
           <a:p>
             <a:pPr lvl="1">
               <a:lnSpc>
-                <a:spcPct val="100000"/>
+                <a:spcPct val="150000"/>
               </a:lnSpc>
               <a:buFont typeface="Wingdings" panose="05000000000000000000" pitchFamily="2" charset="2"/>
               <a:buChar char="§"/>
@@ -29712,7 +30176,7 @@
           <a:p>
             <a:pPr lvl="1">
               <a:lnSpc>
-                <a:spcPct val="100000"/>
+                <a:spcPct val="150000"/>
               </a:lnSpc>
               <a:buFont typeface="Wingdings" panose="05000000000000000000" pitchFamily="2" charset="2"/>
               <a:buChar char="§"/>
@@ -30137,7 +30601,12 @@
             <p:ph idx="1"/>
           </p:nvPr>
         </p:nvSpPr>
-        <p:spPr/>
+        <p:spPr>
+          <a:xfrm>
+            <a:off x="838200" y="1825625"/>
+            <a:ext cx="10515600" cy="4351338"/>
+          </a:xfrm>
+        </p:spPr>
         <p:txBody>
           <a:bodyPr>
             <a:normAutofit/>
@@ -30146,7 +30615,7 @@
           <a:p>
             <a:pPr>
               <a:lnSpc>
-                <a:spcPct val="100000"/>
+                <a:spcPct val="150000"/>
               </a:lnSpc>
               <a:buFont typeface="Wingdings" panose="05000000000000000000" pitchFamily="2" charset="2"/>
               <a:buChar char="§"/>
@@ -30185,7 +30654,7 @@
           <a:p>
             <a:pPr>
               <a:lnSpc>
-                <a:spcPct val="100000"/>
+                <a:spcPct val="150000"/>
               </a:lnSpc>
               <a:buFont typeface="Wingdings" panose="05000000000000000000" pitchFamily="2" charset="2"/>
               <a:buChar char="§"/>
@@ -30194,13 +30663,25 @@
               <a:rPr lang="en-US" sz="2400" dirty="0">
                 <a:latin typeface="+mj-lt"/>
               </a:rPr>
-              <a:t>If we would train a model in a set of data, we could not know if it is actually good. It might be in that particular dataset, but what about when we receive more data? What about in the real word? </a:t>
+              <a:t>If we would train a model in a </a:t>
+            </a:r>
+            <a:r>
+              <a:rPr lang="en-US" sz="2400" b="1" dirty="0">
+                <a:latin typeface="+mj-lt"/>
+              </a:rPr>
+              <a:t>whole set of data</a:t>
+            </a:r>
+            <a:r>
+              <a:rPr lang="en-US" sz="2400" dirty="0">
+                <a:latin typeface="+mj-lt"/>
+              </a:rPr>
+              <a:t>, we could not know if it is actually good; it might be in that particular dataset, but what about when we receive more data? What about in the real word? </a:t>
             </a:r>
           </a:p>
           <a:p>
             <a:pPr>
               <a:lnSpc>
-                <a:spcPct val="100000"/>
+                <a:spcPct val="150000"/>
               </a:lnSpc>
               <a:buFont typeface="Wingdings" panose="05000000000000000000" pitchFamily="2" charset="2"/>
               <a:buChar char="§"/>
@@ -30209,7 +30690,19 @@
               <a:rPr lang="en-US" sz="2400" dirty="0">
                 <a:latin typeface="+mj-lt"/>
               </a:rPr>
-              <a:t>In short, a model is not good because it fits some data well, it is good because that model, which has been trained with those data, is also good when applied to totally new information that was not used for training it.</a:t>
+              <a:t>In short, </a:t>
+            </a:r>
+            <a:r>
+              <a:rPr lang="en-US" sz="2400" b="1" dirty="0">
+                <a:latin typeface="+mj-lt"/>
+              </a:rPr>
+              <a:t>a model is not good because it fits some data well, it is good because that model, which has been trained with those data, is also good when applied to totally new information that was not used for training it</a:t>
+            </a:r>
+            <a:r>
+              <a:rPr lang="en-US" sz="2400" dirty="0">
+                <a:latin typeface="+mj-lt"/>
+              </a:rPr>
+              <a:t>.</a:t>
             </a:r>
           </a:p>
         </p:txBody>

--- a/Course content/Slides/Topic 1 What is ML.pptx
+++ b/Course content/Slides/Topic 1 What is ML.pptx
@@ -17,12 +17,14 @@
     <p:sldId id="282" r:id="rId11"/>
     <p:sldId id="270" r:id="rId12"/>
     <p:sldId id="272" r:id="rId13"/>
-    <p:sldId id="267" r:id="rId14"/>
-    <p:sldId id="271" r:id="rId15"/>
-    <p:sldId id="273" r:id="rId16"/>
-    <p:sldId id="275" r:id="rId17"/>
-    <p:sldId id="276" r:id="rId18"/>
-    <p:sldId id="277" r:id="rId19"/>
+    <p:sldId id="284" r:id="rId14"/>
+    <p:sldId id="267" r:id="rId15"/>
+    <p:sldId id="271" r:id="rId16"/>
+    <p:sldId id="273" r:id="rId17"/>
+    <p:sldId id="275" r:id="rId18"/>
+    <p:sldId id="283" r:id="rId19"/>
+    <p:sldId id="276" r:id="rId20"/>
+    <p:sldId id="277" r:id="rId21"/>
   </p:sldIdLst>
   <p:sldSz cx="12192000" cy="6858000"/>
   <p:notesSz cx="6858000" cy="9144000"/>
@@ -140,6 +142,301 @@
 </p:presentation>
 </file>
 
+<file path=ppt/revisionInfo.xml><?xml version="1.0" encoding="utf-8"?>
+<p1510:revInfo xmlns:a="http://schemas.openxmlformats.org/drawingml/2006/main" xmlns:r="http://schemas.openxmlformats.org/officeDocument/2006/relationships" xmlns:p1510="http://schemas.microsoft.com/office/powerpoint/2015/10/main">
+  <p1510:revLst>
+    <p1510:client id="{F8F14039-D26C-478B-A3B6-430B35B74BC5}" v="4" dt="2023-10-20T16:41:56.826"/>
+  </p1510:revLst>
+</p1510:revInfo>
+</file>
+
+<file path=ppt/changesInfos/changesInfo1.xml><?xml version="1.0" encoding="utf-8"?>
+<pc:chgInfo xmlns:a="http://schemas.openxmlformats.org/drawingml/2006/main" xmlns:r="http://schemas.openxmlformats.org/officeDocument/2006/relationships" xmlns:ac="http://schemas.microsoft.com/office/drawing/2013/main/command" xmlns:pc="http://schemas.microsoft.com/office/powerpoint/2013/main/command">
+  <pc:docChgLst>
+    <pc:chgData name="Javier Bas Vicente" userId="96bf8a96-3310-496c-8c7e-8a087f977faa" providerId="ADAL" clId="{F8F14039-D26C-478B-A3B6-430B35B74BC5}"/>
+    <pc:docChg chg="undo custSel addSld delSld modSld">
+      <pc:chgData name="Javier Bas Vicente" userId="96bf8a96-3310-496c-8c7e-8a087f977faa" providerId="ADAL" clId="{F8F14039-D26C-478B-A3B6-430B35B74BC5}" dt="2023-10-20T16:42:21.664" v="745" actId="1076"/>
+      <pc:docMkLst>
+        <pc:docMk/>
+      </pc:docMkLst>
+      <pc:sldChg chg="modSp mod">
+        <pc:chgData name="Javier Bas Vicente" userId="96bf8a96-3310-496c-8c7e-8a087f977faa" providerId="ADAL" clId="{F8F14039-D26C-478B-A3B6-430B35B74BC5}" dt="2023-10-19T14:57:22.507" v="134" actId="20577"/>
+        <pc:sldMkLst>
+          <pc:docMk/>
+          <pc:sldMk cId="4236828119" sldId="267"/>
+        </pc:sldMkLst>
+        <pc:spChg chg="mod">
+          <ac:chgData name="Javier Bas Vicente" userId="96bf8a96-3310-496c-8c7e-8a087f977faa" providerId="ADAL" clId="{F8F14039-D26C-478B-A3B6-430B35B74BC5}" dt="2023-10-19T14:57:22.507" v="134" actId="20577"/>
+          <ac:spMkLst>
+            <pc:docMk/>
+            <pc:sldMk cId="4236828119" sldId="267"/>
+            <ac:spMk id="3" creationId="{7035E4AA-6F11-BAE1-CC1D-242A88A33FB9}"/>
+          </ac:spMkLst>
+        </pc:spChg>
+      </pc:sldChg>
+      <pc:sldChg chg="modSp mod">
+        <pc:chgData name="Javier Bas Vicente" userId="96bf8a96-3310-496c-8c7e-8a087f977faa" providerId="ADAL" clId="{F8F14039-D26C-478B-A3B6-430B35B74BC5}" dt="2023-10-19T12:42:24.146" v="42" actId="27636"/>
+        <pc:sldMkLst>
+          <pc:docMk/>
+          <pc:sldMk cId="3465997888" sldId="268"/>
+        </pc:sldMkLst>
+        <pc:spChg chg="mod">
+          <ac:chgData name="Javier Bas Vicente" userId="96bf8a96-3310-496c-8c7e-8a087f977faa" providerId="ADAL" clId="{F8F14039-D26C-478B-A3B6-430B35B74BC5}" dt="2023-10-19T12:42:24.146" v="42" actId="27636"/>
+          <ac:spMkLst>
+            <pc:docMk/>
+            <pc:sldMk cId="3465997888" sldId="268"/>
+            <ac:spMk id="3" creationId="{180631EB-DE96-9FA0-145F-1211D8DA1F14}"/>
+          </ac:spMkLst>
+        </pc:spChg>
+      </pc:sldChg>
+      <pc:sldChg chg="modSp mod">
+        <pc:chgData name="Javier Bas Vicente" userId="96bf8a96-3310-496c-8c7e-8a087f977faa" providerId="ADAL" clId="{F8F14039-D26C-478B-A3B6-430B35B74BC5}" dt="2023-10-19T12:44:01.879" v="54" actId="115"/>
+        <pc:sldMkLst>
+          <pc:docMk/>
+          <pc:sldMk cId="2509727003" sldId="269"/>
+        </pc:sldMkLst>
+        <pc:spChg chg="mod">
+          <ac:chgData name="Javier Bas Vicente" userId="96bf8a96-3310-496c-8c7e-8a087f977faa" providerId="ADAL" clId="{F8F14039-D26C-478B-A3B6-430B35B74BC5}" dt="2023-10-19T12:44:01.879" v="54" actId="115"/>
+          <ac:spMkLst>
+            <pc:docMk/>
+            <pc:sldMk cId="2509727003" sldId="269"/>
+            <ac:spMk id="3" creationId="{180631EB-DE96-9FA0-145F-1211D8DA1F14}"/>
+          </ac:spMkLst>
+        </pc:spChg>
+      </pc:sldChg>
+      <pc:sldChg chg="modSp mod">
+        <pc:chgData name="Javier Bas Vicente" userId="96bf8a96-3310-496c-8c7e-8a087f977faa" providerId="ADAL" clId="{F8F14039-D26C-478B-A3B6-430B35B74BC5}" dt="2023-10-19T14:58:31.311" v="188" actId="20577"/>
+        <pc:sldMkLst>
+          <pc:docMk/>
+          <pc:sldMk cId="397702210" sldId="271"/>
+        </pc:sldMkLst>
+        <pc:spChg chg="mod">
+          <ac:chgData name="Javier Bas Vicente" userId="96bf8a96-3310-496c-8c7e-8a087f977faa" providerId="ADAL" clId="{F8F14039-D26C-478B-A3B6-430B35B74BC5}" dt="2023-10-19T14:58:31.311" v="188" actId="20577"/>
+          <ac:spMkLst>
+            <pc:docMk/>
+            <pc:sldMk cId="397702210" sldId="271"/>
+            <ac:spMk id="3" creationId="{7035E4AA-6F11-BAE1-CC1D-242A88A33FB9}"/>
+          </ac:spMkLst>
+        </pc:spChg>
+      </pc:sldChg>
+      <pc:sldChg chg="modSp mod">
+        <pc:chgData name="Javier Bas Vicente" userId="96bf8a96-3310-496c-8c7e-8a087f977faa" providerId="ADAL" clId="{F8F14039-D26C-478B-A3B6-430B35B74BC5}" dt="2023-10-19T12:47:55.622" v="123" actId="20577"/>
+        <pc:sldMkLst>
+          <pc:docMk/>
+          <pc:sldMk cId="3363976930" sldId="272"/>
+        </pc:sldMkLst>
+        <pc:spChg chg="mod">
+          <ac:chgData name="Javier Bas Vicente" userId="96bf8a96-3310-496c-8c7e-8a087f977faa" providerId="ADAL" clId="{F8F14039-D26C-478B-A3B6-430B35B74BC5}" dt="2023-10-19T12:47:55.622" v="123" actId="20577"/>
+          <ac:spMkLst>
+            <pc:docMk/>
+            <pc:sldMk cId="3363976930" sldId="272"/>
+            <ac:spMk id="11" creationId="{9DC8F8AF-3059-79CC-CD66-FE68DE599343}"/>
+          </ac:spMkLst>
+        </pc:spChg>
+      </pc:sldChg>
+      <pc:sldChg chg="modSp mod">
+        <pc:chgData name="Javier Bas Vicente" userId="96bf8a96-3310-496c-8c7e-8a087f977faa" providerId="ADAL" clId="{F8F14039-D26C-478B-A3B6-430B35B74BC5}" dt="2023-10-20T16:30:50.075" v="626" actId="313"/>
+        <pc:sldMkLst>
+          <pc:docMk/>
+          <pc:sldMk cId="363219939" sldId="273"/>
+        </pc:sldMkLst>
+        <pc:spChg chg="mod">
+          <ac:chgData name="Javier Bas Vicente" userId="96bf8a96-3310-496c-8c7e-8a087f977faa" providerId="ADAL" clId="{F8F14039-D26C-478B-A3B6-430B35B74BC5}" dt="2023-10-20T16:30:50.075" v="626" actId="313"/>
+          <ac:spMkLst>
+            <pc:docMk/>
+            <pc:sldMk cId="363219939" sldId="273"/>
+            <ac:spMk id="3" creationId="{7035E4AA-6F11-BAE1-CC1D-242A88A33FB9}"/>
+          </ac:spMkLst>
+        </pc:spChg>
+      </pc:sldChg>
+      <pc:sldChg chg="addSp delSp modSp mod">
+        <pc:chgData name="Javier Bas Vicente" userId="96bf8a96-3310-496c-8c7e-8a087f977faa" providerId="ADAL" clId="{F8F14039-D26C-478B-A3B6-430B35B74BC5}" dt="2023-10-20T16:32:06.259" v="628" actId="22"/>
+        <pc:sldMkLst>
+          <pc:docMk/>
+          <pc:sldMk cId="2616250411" sldId="275"/>
+        </pc:sldMkLst>
+        <pc:spChg chg="mod">
+          <ac:chgData name="Javier Bas Vicente" userId="96bf8a96-3310-496c-8c7e-8a087f977faa" providerId="ADAL" clId="{F8F14039-D26C-478B-A3B6-430B35B74BC5}" dt="2023-10-19T15:08:15.485" v="611" actId="5793"/>
+          <ac:spMkLst>
+            <pc:docMk/>
+            <pc:sldMk cId="2616250411" sldId="275"/>
+            <ac:spMk id="3" creationId="{7035E4AA-6F11-BAE1-CC1D-242A88A33FB9}"/>
+          </ac:spMkLst>
+        </pc:spChg>
+        <pc:spChg chg="add del">
+          <ac:chgData name="Javier Bas Vicente" userId="96bf8a96-3310-496c-8c7e-8a087f977faa" providerId="ADAL" clId="{F8F14039-D26C-478B-A3B6-430B35B74BC5}" dt="2023-10-20T16:32:06.259" v="628" actId="22"/>
+          <ac:spMkLst>
+            <pc:docMk/>
+            <pc:sldMk cId="2616250411" sldId="275"/>
+            <ac:spMk id="8" creationId="{082149E6-2EB1-DDB9-E147-08E89605DCC7}"/>
+          </ac:spMkLst>
+        </pc:spChg>
+      </pc:sldChg>
+      <pc:sldChg chg="modSp mod">
+        <pc:chgData name="Javier Bas Vicente" userId="96bf8a96-3310-496c-8c7e-8a087f977faa" providerId="ADAL" clId="{F8F14039-D26C-478B-A3B6-430B35B74BC5}" dt="2023-10-19T15:09:26.575" v="620" actId="313"/>
+        <pc:sldMkLst>
+          <pc:docMk/>
+          <pc:sldMk cId="1559458376" sldId="277"/>
+        </pc:sldMkLst>
+        <pc:spChg chg="mod">
+          <ac:chgData name="Javier Bas Vicente" userId="96bf8a96-3310-496c-8c7e-8a087f977faa" providerId="ADAL" clId="{F8F14039-D26C-478B-A3B6-430B35B74BC5}" dt="2023-10-19T15:09:26.575" v="620" actId="313"/>
+          <ac:spMkLst>
+            <pc:docMk/>
+            <pc:sldMk cId="1559458376" sldId="277"/>
+            <ac:spMk id="3" creationId="{7035E4AA-6F11-BAE1-CC1D-242A88A33FB9}"/>
+          </ac:spMkLst>
+        </pc:spChg>
+      </pc:sldChg>
+      <pc:sldChg chg="modSp mod">
+        <pc:chgData name="Javier Bas Vicente" userId="96bf8a96-3310-496c-8c7e-8a087f977faa" providerId="ADAL" clId="{F8F14039-D26C-478B-A3B6-430B35B74BC5}" dt="2023-10-19T12:40:05.591" v="3" actId="20577"/>
+        <pc:sldMkLst>
+          <pc:docMk/>
+          <pc:sldMk cId="2149080833" sldId="278"/>
+        </pc:sldMkLst>
+        <pc:spChg chg="mod">
+          <ac:chgData name="Javier Bas Vicente" userId="96bf8a96-3310-496c-8c7e-8a087f977faa" providerId="ADAL" clId="{F8F14039-D26C-478B-A3B6-430B35B74BC5}" dt="2023-10-19T12:40:05.591" v="3" actId="20577"/>
+          <ac:spMkLst>
+            <pc:docMk/>
+            <pc:sldMk cId="2149080833" sldId="278"/>
+            <ac:spMk id="3" creationId="{6866AA87-E000-52D2-F65D-4B414B00BBE5}"/>
+          </ac:spMkLst>
+        </pc:spChg>
+      </pc:sldChg>
+      <pc:sldChg chg="modSp mod">
+        <pc:chgData name="Javier Bas Vicente" userId="96bf8a96-3310-496c-8c7e-8a087f977faa" providerId="ADAL" clId="{F8F14039-D26C-478B-A3B6-430B35B74BC5}" dt="2023-10-19T12:40:48.884" v="27" actId="20577"/>
+        <pc:sldMkLst>
+          <pc:docMk/>
+          <pc:sldMk cId="2034630669" sldId="280"/>
+        </pc:sldMkLst>
+        <pc:spChg chg="mod">
+          <ac:chgData name="Javier Bas Vicente" userId="96bf8a96-3310-496c-8c7e-8a087f977faa" providerId="ADAL" clId="{F8F14039-D26C-478B-A3B6-430B35B74BC5}" dt="2023-10-19T12:40:48.884" v="27" actId="20577"/>
+          <ac:spMkLst>
+            <pc:docMk/>
+            <pc:sldMk cId="2034630669" sldId="280"/>
+            <ac:spMk id="3" creationId="{B73165B8-6446-D9C4-EC8C-EDBC59631C39}"/>
+          </ac:spMkLst>
+        </pc:spChg>
+      </pc:sldChg>
+      <pc:sldChg chg="modSp mod">
+        <pc:chgData name="Javier Bas Vicente" userId="96bf8a96-3310-496c-8c7e-8a087f977faa" providerId="ADAL" clId="{F8F14039-D26C-478B-A3B6-430B35B74BC5}" dt="2023-10-19T12:41:24.394" v="40" actId="27636"/>
+        <pc:sldMkLst>
+          <pc:docMk/>
+          <pc:sldMk cId="3514338654" sldId="281"/>
+        </pc:sldMkLst>
+        <pc:spChg chg="mod">
+          <ac:chgData name="Javier Bas Vicente" userId="96bf8a96-3310-496c-8c7e-8a087f977faa" providerId="ADAL" clId="{F8F14039-D26C-478B-A3B6-430B35B74BC5}" dt="2023-10-19T12:41:24.394" v="40" actId="27636"/>
+          <ac:spMkLst>
+            <pc:docMk/>
+            <pc:sldMk cId="3514338654" sldId="281"/>
+            <ac:spMk id="3" creationId="{B73165B8-6446-D9C4-EC8C-EDBC59631C39}"/>
+          </ac:spMkLst>
+        </pc:spChg>
+      </pc:sldChg>
+      <pc:sldChg chg="modSp mod">
+        <pc:chgData name="Javier Bas Vicente" userId="96bf8a96-3310-496c-8c7e-8a087f977faa" providerId="ADAL" clId="{F8F14039-D26C-478B-A3B6-430B35B74BC5}" dt="2023-10-19T12:45:03.658" v="118" actId="20577"/>
+        <pc:sldMkLst>
+          <pc:docMk/>
+          <pc:sldMk cId="941714419" sldId="282"/>
+        </pc:sldMkLst>
+        <pc:spChg chg="mod">
+          <ac:chgData name="Javier Bas Vicente" userId="96bf8a96-3310-496c-8c7e-8a087f977faa" providerId="ADAL" clId="{F8F14039-D26C-478B-A3B6-430B35B74BC5}" dt="2023-10-19T12:45:03.658" v="118" actId="20577"/>
+          <ac:spMkLst>
+            <pc:docMk/>
+            <pc:sldMk cId="941714419" sldId="282"/>
+            <ac:spMk id="3" creationId="{180631EB-DE96-9FA0-145F-1211D8DA1F14}"/>
+          </ac:spMkLst>
+        </pc:spChg>
+      </pc:sldChg>
+      <pc:sldChg chg="modSp add del mod">
+        <pc:chgData name="Javier Bas Vicente" userId="96bf8a96-3310-496c-8c7e-8a087f977faa" providerId="ADAL" clId="{F8F14039-D26C-478B-A3B6-430B35B74BC5}" dt="2023-10-19T15:07:43.785" v="600" actId="47"/>
+        <pc:sldMkLst>
+          <pc:docMk/>
+          <pc:sldMk cId="607542005" sldId="283"/>
+        </pc:sldMkLst>
+        <pc:spChg chg="mod">
+          <ac:chgData name="Javier Bas Vicente" userId="96bf8a96-3310-496c-8c7e-8a087f977faa" providerId="ADAL" clId="{F8F14039-D26C-478B-A3B6-430B35B74BC5}" dt="2023-10-19T15:06:46.061" v="599" actId="20577"/>
+          <ac:spMkLst>
+            <pc:docMk/>
+            <pc:sldMk cId="607542005" sldId="283"/>
+            <ac:spMk id="3" creationId="{7035E4AA-6F11-BAE1-CC1D-242A88A33FB9}"/>
+          </ac:spMkLst>
+        </pc:spChg>
+      </pc:sldChg>
+      <pc:sldChg chg="addSp modSp add mod">
+        <pc:chgData name="Javier Bas Vicente" userId="96bf8a96-3310-496c-8c7e-8a087f977faa" providerId="ADAL" clId="{F8F14039-D26C-478B-A3B6-430B35B74BC5}" dt="2023-10-20T16:42:21.664" v="745" actId="1076"/>
+        <pc:sldMkLst>
+          <pc:docMk/>
+          <pc:sldMk cId="2486130316" sldId="283"/>
+        </pc:sldMkLst>
+        <pc:spChg chg="mod">
+          <ac:chgData name="Javier Bas Vicente" userId="96bf8a96-3310-496c-8c7e-8a087f977faa" providerId="ADAL" clId="{F8F14039-D26C-478B-A3B6-430B35B74BC5}" dt="2023-10-20T16:32:25.044" v="689" actId="20577"/>
+          <ac:spMkLst>
+            <pc:docMk/>
+            <pc:sldMk cId="2486130316" sldId="283"/>
+            <ac:spMk id="3" creationId="{7035E4AA-6F11-BAE1-CC1D-242A88A33FB9}"/>
+          </ac:spMkLst>
+        </pc:spChg>
+        <pc:picChg chg="add mod">
+          <ac:chgData name="Javier Bas Vicente" userId="96bf8a96-3310-496c-8c7e-8a087f977faa" providerId="ADAL" clId="{F8F14039-D26C-478B-A3B6-430B35B74BC5}" dt="2023-10-20T16:42:21.664" v="745" actId="1076"/>
+          <ac:picMkLst>
+            <pc:docMk/>
+            <pc:sldMk cId="2486130316" sldId="283"/>
+            <ac:picMk id="8" creationId="{FD52F510-0239-0B53-03EE-845B2631F465}"/>
+          </ac:picMkLst>
+        </pc:picChg>
+      </pc:sldChg>
+      <pc:sldChg chg="addSp delSp modSp add mod">
+        <pc:chgData name="Javier Bas Vicente" userId="96bf8a96-3310-496c-8c7e-8a087f977faa" providerId="ADAL" clId="{F8F14039-D26C-478B-A3B6-430B35B74BC5}" dt="2023-10-20T16:41:36.259" v="712" actId="1036"/>
+        <pc:sldMkLst>
+          <pc:docMk/>
+          <pc:sldMk cId="1253646022" sldId="284"/>
+        </pc:sldMkLst>
+        <pc:spChg chg="mod">
+          <ac:chgData name="Javier Bas Vicente" userId="96bf8a96-3310-496c-8c7e-8a087f977faa" providerId="ADAL" clId="{F8F14039-D26C-478B-A3B6-430B35B74BC5}" dt="2023-10-20T16:40:01.034" v="691"/>
+          <ac:spMkLst>
+            <pc:docMk/>
+            <pc:sldMk cId="1253646022" sldId="284"/>
+            <ac:spMk id="2" creationId="{F140273F-00A5-2CDE-5EC1-05720B283B27}"/>
+          </ac:spMkLst>
+        </pc:spChg>
+        <pc:spChg chg="del">
+          <ac:chgData name="Javier Bas Vicente" userId="96bf8a96-3310-496c-8c7e-8a087f977faa" providerId="ADAL" clId="{F8F14039-D26C-478B-A3B6-430B35B74BC5}" dt="2023-10-20T16:40:04.809" v="692" actId="478"/>
+          <ac:spMkLst>
+            <pc:docMk/>
+            <pc:sldMk cId="1253646022" sldId="284"/>
+            <ac:spMk id="3" creationId="{7035E4AA-6F11-BAE1-CC1D-242A88A33FB9}"/>
+          </ac:spMkLst>
+        </pc:spChg>
+        <pc:spChg chg="add del mod">
+          <ac:chgData name="Javier Bas Vicente" userId="96bf8a96-3310-496c-8c7e-8a087f977faa" providerId="ADAL" clId="{F8F14039-D26C-478B-A3B6-430B35B74BC5}" dt="2023-10-20T16:40:06.348" v="693" actId="478"/>
+          <ac:spMkLst>
+            <pc:docMk/>
+            <pc:sldMk cId="1253646022" sldId="284"/>
+            <ac:spMk id="8" creationId="{23453BCB-4561-72ED-92D2-6786420DB975}"/>
+          </ac:spMkLst>
+        </pc:spChg>
+        <pc:spChg chg="add del mod">
+          <ac:chgData name="Javier Bas Vicente" userId="96bf8a96-3310-496c-8c7e-8a087f977faa" providerId="ADAL" clId="{F8F14039-D26C-478B-A3B6-430B35B74BC5}" dt="2023-10-20T16:41:20.064" v="697" actId="22"/>
+          <ac:spMkLst>
+            <pc:docMk/>
+            <pc:sldMk cId="1253646022" sldId="284"/>
+            <ac:spMk id="10" creationId="{AF6699C6-F083-2E67-9F48-3C4EA7AAD0FF}"/>
+          </ac:spMkLst>
+        </pc:spChg>
+        <pc:picChg chg="add mod">
+          <ac:chgData name="Javier Bas Vicente" userId="96bf8a96-3310-496c-8c7e-8a087f977faa" providerId="ADAL" clId="{F8F14039-D26C-478B-A3B6-430B35B74BC5}" dt="2023-10-20T16:41:36.259" v="712" actId="1036"/>
+          <ac:picMkLst>
+            <pc:docMk/>
+            <pc:sldMk cId="1253646022" sldId="284"/>
+            <ac:picMk id="12" creationId="{A6B66FBC-5EA9-B6EC-8504-8AA497393C78}"/>
+          </ac:picMkLst>
+        </pc:picChg>
+      </pc:sldChg>
+    </pc:docChg>
+  </pc:docChgLst>
+</pc:chgInfo>
+</file>
+
 <file path=ppt/slideLayouts/slideLayout1.xml><?xml version="1.0" encoding="utf-8"?>
 <p:sldLayout xmlns:a="http://schemas.openxmlformats.org/drawingml/2006/main" xmlns:r="http://schemas.openxmlformats.org/officeDocument/2006/relationships" xmlns:p="http://schemas.openxmlformats.org/presentationml/2006/main" type="title" preserve="1">
   <p:cSld name="Title Slide">
@@ -287,7 +584,7 @@
           <a:p>
             <a:fld id="{A7DB5662-7327-465C-9A70-AD96B7A8D67A}" type="datetimeFigureOut">
               <a:rPr lang="en-US" smtClean="0"/>
-              <a:t>10/18/2022</a:t>
+              <a:t>10/20/2023</a:t>
             </a:fld>
             <a:endParaRPr lang="en-US"/>
           </a:p>
@@ -485,7 +782,7 @@
           <a:p>
             <a:fld id="{A7DB5662-7327-465C-9A70-AD96B7A8D67A}" type="datetimeFigureOut">
               <a:rPr lang="en-US" smtClean="0"/>
-              <a:t>10/18/2022</a:t>
+              <a:t>10/20/2023</a:t>
             </a:fld>
             <a:endParaRPr lang="en-US"/>
           </a:p>
@@ -693,7 +990,7 @@
           <a:p>
             <a:fld id="{A7DB5662-7327-465C-9A70-AD96B7A8D67A}" type="datetimeFigureOut">
               <a:rPr lang="en-US" smtClean="0"/>
-              <a:t>10/18/2022</a:t>
+              <a:t>10/20/2023</a:t>
             </a:fld>
             <a:endParaRPr lang="en-US"/>
           </a:p>
@@ -891,7 +1188,7 @@
           <a:p>
             <a:fld id="{A7DB5662-7327-465C-9A70-AD96B7A8D67A}" type="datetimeFigureOut">
               <a:rPr lang="en-US" smtClean="0"/>
-              <a:t>10/18/2022</a:t>
+              <a:t>10/20/2023</a:t>
             </a:fld>
             <a:endParaRPr lang="en-US"/>
           </a:p>
@@ -1166,7 +1463,7 @@
           <a:p>
             <a:fld id="{A7DB5662-7327-465C-9A70-AD96B7A8D67A}" type="datetimeFigureOut">
               <a:rPr lang="en-US" smtClean="0"/>
-              <a:t>10/18/2022</a:t>
+              <a:t>10/20/2023</a:t>
             </a:fld>
             <a:endParaRPr lang="en-US"/>
           </a:p>
@@ -1431,7 +1728,7 @@
           <a:p>
             <a:fld id="{A7DB5662-7327-465C-9A70-AD96B7A8D67A}" type="datetimeFigureOut">
               <a:rPr lang="en-US" smtClean="0"/>
-              <a:t>10/18/2022</a:t>
+              <a:t>10/20/2023</a:t>
             </a:fld>
             <a:endParaRPr lang="en-US"/>
           </a:p>
@@ -1843,7 +2140,7 @@
           <a:p>
             <a:fld id="{A7DB5662-7327-465C-9A70-AD96B7A8D67A}" type="datetimeFigureOut">
               <a:rPr lang="en-US" smtClean="0"/>
-              <a:t>10/18/2022</a:t>
+              <a:t>10/20/2023</a:t>
             </a:fld>
             <a:endParaRPr lang="en-US"/>
           </a:p>
@@ -1984,7 +2281,7 @@
           <a:p>
             <a:fld id="{A7DB5662-7327-465C-9A70-AD96B7A8D67A}" type="datetimeFigureOut">
               <a:rPr lang="en-US" smtClean="0"/>
-              <a:t>10/18/2022</a:t>
+              <a:t>10/20/2023</a:t>
             </a:fld>
             <a:endParaRPr lang="en-US"/>
           </a:p>
@@ -2097,7 +2394,7 @@
           <a:p>
             <a:fld id="{A7DB5662-7327-465C-9A70-AD96B7A8D67A}" type="datetimeFigureOut">
               <a:rPr lang="en-US" smtClean="0"/>
-              <a:t>10/18/2022</a:t>
+              <a:t>10/20/2023</a:t>
             </a:fld>
             <a:endParaRPr lang="en-US"/>
           </a:p>
@@ -2408,7 +2705,7 @@
           <a:p>
             <a:fld id="{A7DB5662-7327-465C-9A70-AD96B7A8D67A}" type="datetimeFigureOut">
               <a:rPr lang="en-US" smtClean="0"/>
-              <a:t>10/18/2022</a:t>
+              <a:t>10/20/2023</a:t>
             </a:fld>
             <a:endParaRPr lang="en-US"/>
           </a:p>
@@ -2696,7 +2993,7 @@
           <a:p>
             <a:fld id="{A7DB5662-7327-465C-9A70-AD96B7A8D67A}" type="datetimeFigureOut">
               <a:rPr lang="en-US" smtClean="0"/>
-              <a:t>10/18/2022</a:t>
+              <a:t>10/20/2023</a:t>
             </a:fld>
             <a:endParaRPr lang="en-US"/>
           </a:p>
@@ -2937,7 +3234,7 @@
           <a:p>
             <a:fld id="{A7DB5662-7327-465C-9A70-AD96B7A8D67A}" type="datetimeFigureOut">
               <a:rPr lang="en-US" smtClean="0"/>
-              <a:t>10/18/2022</a:t>
+              <a:t>10/20/2023</a:t>
             </a:fld>
             <a:endParaRPr lang="en-US"/>
           </a:p>
@@ -3489,7 +3786,7 @@
                 <a:latin typeface="+mj-lt"/>
                 <a:cs typeface="Times New Roman" panose="02020603050405020304" pitchFamily="18" charset="0"/>
               </a:rPr>
-              <a:t>2022/2023</a:t>
+              <a:t>2023/2024</a:t>
             </a:r>
             <a:endParaRPr lang="en-US" sz="2000" dirty="0">
               <a:latin typeface="+mj-lt"/>
@@ -21357,7 +21654,7 @@
         <p:spPr/>
         <p:txBody>
           <a:bodyPr>
-            <a:normAutofit/>
+            <a:normAutofit fontScale="92500" lnSpcReduction="20000"/>
           </a:bodyPr>
           <a:lstStyle/>
           <a:p>
@@ -21369,10 +21666,22 @@
               <a:buChar char="§"/>
             </a:pPr>
             <a:r>
-              <a:rPr lang="en-US" sz="2400" dirty="0">
+              <a:rPr lang="en-US" dirty="0">
                 <a:latin typeface="+mj-lt"/>
               </a:rPr>
-              <a:t>They way in which we tackle this issue is by splitting the data into two independent sets:</a:t>
+              <a:t>They way in which we </a:t>
+            </a:r>
+            <a:r>
+              <a:rPr lang="en-US" dirty="0" err="1">
+                <a:latin typeface="+mj-lt"/>
+              </a:rPr>
+              <a:t>apporach</a:t>
+            </a:r>
+            <a:r>
+              <a:rPr lang="en-US" dirty="0">
+                <a:latin typeface="+mj-lt"/>
+              </a:rPr>
+              <a:t> this need is by splitting the data into two independent sets:</a:t>
             </a:r>
           </a:p>
           <a:p>
@@ -21384,16 +21693,16 @@
               <a:buChar char="§"/>
             </a:pPr>
             <a:r>
-              <a:rPr lang="en-US" sz="2000" b="1" dirty="0">
+              <a:rPr lang="en-US" b="1" dirty="0">
                 <a:latin typeface="+mj-lt"/>
               </a:rPr>
               <a:t>Training</a:t>
             </a:r>
             <a:r>
-              <a:rPr lang="en-US" sz="2000" dirty="0">
+              <a:rPr lang="en-US" dirty="0">
                 <a:latin typeface="+mj-lt"/>
               </a:rPr>
-              <a:t>: The model is trained on this observations</a:t>
+              <a:t>: The model is trained on a number of observations</a:t>
             </a:r>
           </a:p>
           <a:p>
@@ -21405,16 +21714,16 @@
               <a:buChar char="§"/>
             </a:pPr>
             <a:r>
-              <a:rPr lang="en-US" sz="2000" b="1" dirty="0">
+              <a:rPr lang="en-US" b="1" dirty="0">
                 <a:latin typeface="+mj-lt"/>
               </a:rPr>
               <a:t>Testing</a:t>
             </a:r>
             <a:r>
-              <a:rPr lang="en-US" sz="2000" dirty="0">
+              <a:rPr lang="en-US" dirty="0">
                 <a:latin typeface="+mj-lt"/>
               </a:rPr>
-              <a:t>: The model is tested on these other observations, which it has not seen before</a:t>
+              <a:t>: The model is tested on a set of different observations, which it has not seen before</a:t>
             </a:r>
           </a:p>
           <a:p>
@@ -21426,31 +21735,31 @@
               <a:buChar char="§"/>
             </a:pPr>
             <a:r>
-              <a:rPr lang="en-US" sz="2400" dirty="0">
+              <a:rPr lang="en-US" dirty="0">
                 <a:latin typeface="+mj-lt"/>
               </a:rPr>
               <a:t>The performance of a model (measured with specific metrics) is always superior in </a:t>
             </a:r>
             <a:r>
-              <a:rPr lang="en-US" sz="2400" b="1" dirty="0">
+              <a:rPr lang="en-US" b="1" dirty="0">
                 <a:latin typeface="+mj-lt"/>
               </a:rPr>
               <a:t>training</a:t>
             </a:r>
             <a:r>
-              <a:rPr lang="en-US" sz="2400" dirty="0">
+              <a:rPr lang="en-US" dirty="0">
                 <a:latin typeface="+mj-lt"/>
               </a:rPr>
               <a:t>, but our job is to make sure that it is as large as possible in </a:t>
             </a:r>
             <a:r>
-              <a:rPr lang="en-US" sz="2400" b="1" dirty="0">
+              <a:rPr lang="en-US" b="1" dirty="0">
                 <a:latin typeface="+mj-lt"/>
               </a:rPr>
               <a:t>testing</a:t>
             </a:r>
             <a:r>
-              <a:rPr lang="en-US" sz="2400" dirty="0">
+              <a:rPr lang="en-US" dirty="0">
                 <a:latin typeface="+mj-lt"/>
               </a:rPr>
               <a:t>.</a:t>
@@ -22891,10 +23200,16 @@
               <a:t>As model flexibility increases, the </a:t>
             </a:r>
             <a:r>
+              <a:rPr lang="en-US" b="1" u="sng" dirty="0">
+                <a:latin typeface="+mj-lt"/>
+              </a:rPr>
+              <a:t>training</a:t>
+            </a:r>
+            <a:r>
               <a:rPr lang="en-US" b="1" dirty="0">
                 <a:latin typeface="+mj-lt"/>
               </a:rPr>
-              <a:t>training MSE decrease…</a:t>
+              <a:t> MSE decrease…</a:t>
             </a:r>
             <a:r>
               <a:rPr lang="en-US" dirty="0">
@@ -22903,10 +23218,16 @@
               <a:t> but the </a:t>
             </a:r>
             <a:r>
+              <a:rPr lang="en-US" b="1" u="sng" dirty="0">
+                <a:latin typeface="+mj-lt"/>
+              </a:rPr>
+              <a:t>testing</a:t>
+            </a:r>
+            <a:r>
               <a:rPr lang="en-US" b="1" dirty="0">
                 <a:latin typeface="+mj-lt"/>
               </a:rPr>
-              <a:t>test MSE may not!</a:t>
+              <a:t> MSE may not!</a:t>
             </a:r>
             <a:endParaRPr lang="en-US" dirty="0">
               <a:latin typeface="+mj-lt"/>
@@ -23169,6 +23490,452 @@
       </p:sp>
       <p:sp>
         <p:nvSpPr>
+          <p:cNvPr id="4" name="Rectángulo 3">
+            <a:extLst>
+              <a:ext uri="{FF2B5EF4-FFF2-40B4-BE49-F238E27FC236}">
+                <a16:creationId xmlns:a16="http://schemas.microsoft.com/office/drawing/2014/main" id="{2D452C83-A2F9-2908-46B1-0DCFA9342F79}"/>
+              </a:ext>
+            </a:extLst>
+          </p:cNvPr>
+          <p:cNvSpPr/>
+          <p:nvPr/>
+        </p:nvSpPr>
+        <p:spPr>
+          <a:xfrm>
+            <a:off x="0" y="0"/>
+            <a:ext cx="374469" cy="6858000"/>
+          </a:xfrm>
+          <a:prstGeom prst="rect">
+            <a:avLst/>
+          </a:prstGeom>
+        </p:spPr>
+        <p:style>
+          <a:lnRef idx="2">
+            <a:schemeClr val="accent2">
+              <a:shade val="50000"/>
+            </a:schemeClr>
+          </a:lnRef>
+          <a:fillRef idx="1">
+            <a:schemeClr val="accent2"/>
+          </a:fillRef>
+          <a:effectRef idx="0">
+            <a:schemeClr val="accent2"/>
+          </a:effectRef>
+          <a:fontRef idx="minor">
+            <a:schemeClr val="lt1"/>
+          </a:fontRef>
+        </p:style>
+        <p:txBody>
+          <a:bodyPr rtlCol="0" anchor="ctr"/>
+          <a:lstStyle/>
+          <a:p>
+            <a:pPr algn="ctr"/>
+            <a:endParaRPr lang="es-ES"/>
+          </a:p>
+        </p:txBody>
+      </p:sp>
+      <p:sp>
+        <p:nvSpPr>
+          <p:cNvPr id="5" name="Rectangle 143">
+            <a:extLst>
+              <a:ext uri="{FF2B5EF4-FFF2-40B4-BE49-F238E27FC236}">
+                <a16:creationId xmlns:a16="http://schemas.microsoft.com/office/drawing/2014/main" id="{4730D885-E7EB-E846-1C03-40A873EC3209}"/>
+              </a:ext>
+            </a:extLst>
+          </p:cNvPr>
+          <p:cNvSpPr>
+            <a:spLocks noChangeArrowheads="1"/>
+          </p:cNvSpPr>
+          <p:nvPr/>
+        </p:nvSpPr>
+        <p:spPr bwMode="auto">
+          <a:xfrm>
+            <a:off x="448342" y="6401243"/>
+            <a:ext cx="5730175" cy="307777"/>
+          </a:xfrm>
+          <a:prstGeom prst="rect">
+            <a:avLst/>
+          </a:prstGeom>
+          <a:noFill/>
+          <a:ln>
+            <a:noFill/>
+          </a:ln>
+          <a:effectLst/>
+          <a:extLst>
+            <a:ext uri="{909E8E84-426E-40DD-AFC4-6F175D3DCCD1}">
+              <a14:hiddenFill xmlns:a14="http://schemas.microsoft.com/office/drawing/2010/main">
+                <a:solidFill>
+                  <a:schemeClr val="accent1"/>
+                </a:solidFill>
+              </a14:hiddenFill>
+            </a:ext>
+            <a:ext uri="{91240B29-F687-4F45-9708-019B960494DF}">
+              <a14:hiddenLine xmlns:a14="http://schemas.microsoft.com/office/drawing/2010/main" w="9525">
+                <a:solidFill>
+                  <a:schemeClr val="tx1"/>
+                </a:solidFill>
+                <a:miter lim="800000"/>
+                <a:headEnd/>
+                <a:tailEnd/>
+              </a14:hiddenLine>
+            </a:ext>
+            <a:ext uri="{AF507438-7753-43E0-B8FC-AC1667EBCBE1}">
+              <a14:hiddenEffects xmlns:a14="http://schemas.microsoft.com/office/drawing/2010/main">
+                <a:effectLst>
+                  <a:outerShdw dist="35921" dir="2700000" algn="ctr" rotWithShape="0">
+                    <a:schemeClr val="bg2"/>
+                  </a:outerShdw>
+                </a:effectLst>
+              </a14:hiddenEffects>
+            </a:ext>
+          </a:extLst>
+        </p:spPr>
+        <p:txBody>
+          <a:bodyPr vert="horz" wrap="square" lIns="91440" tIns="45720" rIns="91440" bIns="45720" numCol="1" anchor="ctr" anchorCtr="0" compatLnSpc="1">
+            <a:prstTxWarp prst="textNoShape">
+              <a:avLst/>
+            </a:prstTxWarp>
+            <a:spAutoFit/>
+          </a:bodyPr>
+          <a:lstStyle/>
+          <a:p>
+            <a:pPr marL="0" marR="0" lvl="0" indent="0" algn="l" defTabSz="914400" rtl="0" eaLnBrk="0" fontAlgn="base" latinLnBrk="0" hangingPunct="0">
+              <a:lnSpc>
+                <a:spcPct val="100000"/>
+              </a:lnSpc>
+              <a:spcBef>
+                <a:spcPct val="0"/>
+              </a:spcBef>
+              <a:spcAft>
+                <a:spcPct val="0"/>
+              </a:spcAft>
+              <a:buClrTx/>
+              <a:buSzTx/>
+              <a:buFontTx/>
+              <a:buNone/>
+              <a:tabLst/>
+            </a:pPr>
+            <a:r>
+              <a:rPr kumimoji="0" lang="en-US" altLang="es-ES" sz="1400" b="0" i="0" u="none" strike="noStrike" cap="none" normalizeH="0" baseline="0" dirty="0">
+                <a:ln>
+                  <a:noFill/>
+                </a:ln>
+                <a:solidFill>
+                  <a:srgbClr val="F4A200"/>
+                </a:solidFill>
+                <a:effectLst/>
+                <a:latin typeface="Arial" panose="020B0604020202020204" pitchFamily="34" charset="0"/>
+                <a:ea typeface="Myriad Pro Light"/>
+                <a:cs typeface="Times New Roman" panose="02020603050405020304" pitchFamily="18" charset="0"/>
+              </a:rPr>
+              <a:t>Master in Quantitative Economic Analysis </a:t>
+            </a:r>
+            <a:r>
+              <a:rPr kumimoji="0" lang="en-US" altLang="es-ES" sz="1400" b="0" i="0" u="none" strike="noStrike" cap="none" normalizeH="0" baseline="0" dirty="0" err="1">
+                <a:ln>
+                  <a:noFill/>
+                </a:ln>
+                <a:solidFill>
+                  <a:srgbClr val="F4A200"/>
+                </a:solidFill>
+                <a:effectLst/>
+                <a:latin typeface="Arial" panose="020B0604020202020204" pitchFamily="34" charset="0"/>
+                <a:ea typeface="Myriad Pro Light"/>
+                <a:cs typeface="Times New Roman" panose="02020603050405020304" pitchFamily="18" charset="0"/>
+              </a:rPr>
+              <a:t>MQuEA</a:t>
+            </a:r>
+            <a:endParaRPr kumimoji="0" lang="es-ES" altLang="es-ES" sz="500" b="0" i="0" u="none" strike="noStrike" cap="none" normalizeH="0" baseline="0" dirty="0">
+              <a:ln>
+                <a:noFill/>
+              </a:ln>
+              <a:solidFill>
+                <a:schemeClr val="tx1"/>
+              </a:solidFill>
+              <a:effectLst/>
+              <a:latin typeface="Arial" panose="020B0604020202020204" pitchFamily="34" charset="0"/>
+            </a:endParaRPr>
+          </a:p>
+        </p:txBody>
+      </p:sp>
+      <p:sp>
+        <p:nvSpPr>
+          <p:cNvPr id="6" name="Rectangle 143">
+            <a:extLst>
+              <a:ext uri="{FF2B5EF4-FFF2-40B4-BE49-F238E27FC236}">
+                <a16:creationId xmlns:a16="http://schemas.microsoft.com/office/drawing/2014/main" id="{FAB3B03A-558F-7DDE-F946-6CF9F25B0574}"/>
+              </a:ext>
+            </a:extLst>
+          </p:cNvPr>
+          <p:cNvSpPr>
+            <a:spLocks noChangeArrowheads="1"/>
+          </p:cNvSpPr>
+          <p:nvPr/>
+        </p:nvSpPr>
+        <p:spPr bwMode="auto">
+          <a:xfrm>
+            <a:off x="6186394" y="6411881"/>
+            <a:ext cx="5730175" cy="307777"/>
+          </a:xfrm>
+          <a:prstGeom prst="rect">
+            <a:avLst/>
+          </a:prstGeom>
+          <a:noFill/>
+          <a:ln>
+            <a:noFill/>
+          </a:ln>
+          <a:effectLst/>
+          <a:extLst>
+            <a:ext uri="{909E8E84-426E-40DD-AFC4-6F175D3DCCD1}">
+              <a14:hiddenFill xmlns:a14="http://schemas.microsoft.com/office/drawing/2010/main">
+                <a:solidFill>
+                  <a:schemeClr val="accent1"/>
+                </a:solidFill>
+              </a14:hiddenFill>
+            </a:ext>
+            <a:ext uri="{91240B29-F687-4F45-9708-019B960494DF}">
+              <a14:hiddenLine xmlns:a14="http://schemas.microsoft.com/office/drawing/2010/main" w="9525">
+                <a:solidFill>
+                  <a:schemeClr val="tx1"/>
+                </a:solidFill>
+                <a:miter lim="800000"/>
+                <a:headEnd/>
+                <a:tailEnd/>
+              </a14:hiddenLine>
+            </a:ext>
+            <a:ext uri="{AF507438-7753-43E0-B8FC-AC1667EBCBE1}">
+              <a14:hiddenEffects xmlns:a14="http://schemas.microsoft.com/office/drawing/2010/main">
+                <a:effectLst>
+                  <a:outerShdw dist="35921" dir="2700000" algn="ctr" rotWithShape="0">
+                    <a:schemeClr val="bg2"/>
+                  </a:outerShdw>
+                </a:effectLst>
+              </a14:hiddenEffects>
+            </a:ext>
+          </a:extLst>
+        </p:spPr>
+        <p:txBody>
+          <a:bodyPr vert="horz" wrap="square" lIns="91440" tIns="45720" rIns="91440" bIns="45720" numCol="1" anchor="ctr" anchorCtr="0" compatLnSpc="1">
+            <a:prstTxWarp prst="textNoShape">
+              <a:avLst/>
+            </a:prstTxWarp>
+            <a:spAutoFit/>
+          </a:bodyPr>
+          <a:lstStyle/>
+          <a:p>
+            <a:pPr marL="0" marR="0" lvl="0" indent="0" algn="r" defTabSz="914400" rtl="0" eaLnBrk="0" fontAlgn="base" latinLnBrk="0" hangingPunct="0">
+              <a:lnSpc>
+                <a:spcPct val="100000"/>
+              </a:lnSpc>
+              <a:spcBef>
+                <a:spcPct val="0"/>
+              </a:spcBef>
+              <a:spcAft>
+                <a:spcPct val="0"/>
+              </a:spcAft>
+              <a:buClrTx/>
+              <a:buSzTx/>
+              <a:buFontTx/>
+              <a:buNone/>
+              <a:tabLst/>
+            </a:pPr>
+            <a:r>
+              <a:rPr kumimoji="0" lang="en-US" altLang="es-ES" sz="1400" b="0" i="0" u="none" strike="noStrike" cap="none" normalizeH="0" baseline="0" dirty="0">
+                <a:ln>
+                  <a:noFill/>
+                </a:ln>
+                <a:solidFill>
+                  <a:srgbClr val="F4A200"/>
+                </a:solidFill>
+                <a:effectLst/>
+                <a:latin typeface="Arial" panose="020B0604020202020204" pitchFamily="34" charset="0"/>
+                <a:ea typeface="Myriad Pro Light"/>
+                <a:cs typeface="Times New Roman" panose="02020603050405020304" pitchFamily="18" charset="0"/>
+              </a:rPr>
+              <a:t>Universidad </a:t>
+            </a:r>
+            <a:r>
+              <a:rPr kumimoji="0" lang="en-US" altLang="es-ES" sz="1400" b="0" i="0" u="none" strike="noStrike" cap="none" normalizeH="0" baseline="0" dirty="0" err="1">
+                <a:ln>
+                  <a:noFill/>
+                </a:ln>
+                <a:solidFill>
+                  <a:srgbClr val="F4A200"/>
+                </a:solidFill>
+                <a:effectLst/>
+                <a:latin typeface="Arial" panose="020B0604020202020204" pitchFamily="34" charset="0"/>
+                <a:ea typeface="Myriad Pro Light"/>
+                <a:cs typeface="Times New Roman" panose="02020603050405020304" pitchFamily="18" charset="0"/>
+              </a:rPr>
+              <a:t>Aut</a:t>
+            </a:r>
+            <a:r>
+              <a:rPr lang="en-US" altLang="es-ES" sz="1400" dirty="0" err="1">
+                <a:solidFill>
+                  <a:srgbClr val="F4A200"/>
+                </a:solidFill>
+                <a:latin typeface="Arial" panose="020B0604020202020204" pitchFamily="34" charset="0"/>
+                <a:ea typeface="Myriad Pro Light"/>
+                <a:cs typeface="Times New Roman" panose="02020603050405020304" pitchFamily="18" charset="0"/>
+              </a:rPr>
+              <a:t>ó</a:t>
+            </a:r>
+            <a:r>
+              <a:rPr kumimoji="0" lang="en-US" altLang="es-ES" sz="1400" b="0" i="0" u="none" strike="noStrike" cap="none" normalizeH="0" baseline="0" dirty="0" err="1">
+                <a:ln>
+                  <a:noFill/>
+                </a:ln>
+                <a:solidFill>
+                  <a:srgbClr val="F4A200"/>
+                </a:solidFill>
+                <a:effectLst/>
+                <a:latin typeface="Arial" panose="020B0604020202020204" pitchFamily="34" charset="0"/>
+                <a:ea typeface="Myriad Pro Light"/>
+                <a:cs typeface="Times New Roman" panose="02020603050405020304" pitchFamily="18" charset="0"/>
+              </a:rPr>
+              <a:t>noma</a:t>
+            </a:r>
+            <a:r>
+              <a:rPr kumimoji="0" lang="en-US" altLang="es-ES" sz="1400" b="0" i="0" u="none" strike="noStrike" cap="none" normalizeH="0" baseline="0" dirty="0">
+                <a:ln>
+                  <a:noFill/>
+                </a:ln>
+                <a:solidFill>
+                  <a:srgbClr val="F4A200"/>
+                </a:solidFill>
+                <a:effectLst/>
+                <a:latin typeface="Arial" panose="020B0604020202020204" pitchFamily="34" charset="0"/>
+                <a:ea typeface="Myriad Pro Light"/>
+                <a:cs typeface="Times New Roman" panose="02020603050405020304" pitchFamily="18" charset="0"/>
+              </a:rPr>
+              <a:t> de Madrid</a:t>
+            </a:r>
+            <a:endParaRPr kumimoji="0" lang="es-ES" altLang="es-ES" sz="500" b="0" i="0" u="none" strike="noStrike" cap="none" normalizeH="0" baseline="0" dirty="0">
+              <a:ln>
+                <a:noFill/>
+              </a:ln>
+              <a:solidFill>
+                <a:schemeClr val="tx1"/>
+              </a:solidFill>
+              <a:effectLst/>
+              <a:latin typeface="Arial" panose="020B0604020202020204" pitchFamily="34" charset="0"/>
+            </a:endParaRPr>
+          </a:p>
+        </p:txBody>
+      </p:sp>
+      <p:pic>
+        <p:nvPicPr>
+          <p:cNvPr id="12" name="Picture 11">
+            <a:extLst>
+              <a:ext uri="{FF2B5EF4-FFF2-40B4-BE49-F238E27FC236}">
+                <a16:creationId xmlns:a16="http://schemas.microsoft.com/office/drawing/2014/main" id="{A6B66FBC-5EA9-B6EC-8504-8AA497393C78}"/>
+              </a:ext>
+            </a:extLst>
+          </p:cNvPr>
+          <p:cNvPicPr>
+            <a:picLocks noChangeAspect="1"/>
+          </p:cNvPicPr>
+          <p:nvPr/>
+        </p:nvPicPr>
+        <p:blipFill>
+          <a:blip r:embed="rId2"/>
+          <a:stretch>
+            <a:fillRect/>
+          </a:stretch>
+        </p:blipFill>
+        <p:spPr>
+          <a:xfrm>
+            <a:off x="2683450" y="1703214"/>
+            <a:ext cx="6825100" cy="4297680"/>
+          </a:xfrm>
+          <a:prstGeom prst="rect">
+            <a:avLst/>
+          </a:prstGeom>
+        </p:spPr>
+      </p:pic>
+    </p:spTree>
+    <p:extLst>
+      <p:ext uri="{BB962C8B-B14F-4D97-AF65-F5344CB8AC3E}">
+        <p14:creationId xmlns:p14="http://schemas.microsoft.com/office/powerpoint/2010/main" val="1253646022"/>
+      </p:ext>
+    </p:extLst>
+  </p:cSld>
+  <p:clrMapOvr>
+    <a:masterClrMapping/>
+  </p:clrMapOvr>
+</p:sld>
+</file>
+
+<file path=ppt/slides/slide14.xml><?xml version="1.0" encoding="utf-8"?>
+<p:sld xmlns:a="http://schemas.openxmlformats.org/drawingml/2006/main" xmlns:r="http://schemas.openxmlformats.org/officeDocument/2006/relationships" xmlns:p="http://schemas.openxmlformats.org/presentationml/2006/main">
+  <p:cSld>
+    <p:spTree>
+      <p:nvGrpSpPr>
+        <p:cNvPr id="1" name=""/>
+        <p:cNvGrpSpPr/>
+        <p:nvPr/>
+      </p:nvGrpSpPr>
+      <p:grpSpPr>
+        <a:xfrm>
+          <a:off x="0" y="0"/>
+          <a:ext cx="0" cy="0"/>
+          <a:chOff x="0" y="0"/>
+          <a:chExt cx="0" cy="0"/>
+        </a:xfrm>
+      </p:grpSpPr>
+      <p:sp>
+        <p:nvSpPr>
+          <p:cNvPr id="2" name="Title 1">
+            <a:extLst>
+              <a:ext uri="{FF2B5EF4-FFF2-40B4-BE49-F238E27FC236}">
+                <a16:creationId xmlns:a16="http://schemas.microsoft.com/office/drawing/2014/main" id="{F140273F-00A5-2CDE-5EC1-05720B283B27}"/>
+              </a:ext>
+            </a:extLst>
+          </p:cNvPr>
+          <p:cNvSpPr>
+            <a:spLocks noGrp="1"/>
+          </p:cNvSpPr>
+          <p:nvPr>
+            <p:ph type="title"/>
+          </p:nvPr>
+        </p:nvSpPr>
+        <p:spPr/>
+        <p:txBody>
+          <a:bodyPr>
+            <a:normAutofit/>
+          </a:bodyPr>
+          <a:lstStyle/>
+          <a:p>
+            <a:r>
+              <a:rPr lang="es-ES" sz="4000" dirty="0" err="1"/>
+              <a:t>The</a:t>
+            </a:r>
+            <a:r>
+              <a:rPr lang="es-ES" sz="4000" dirty="0"/>
+              <a:t> </a:t>
+            </a:r>
+            <a:r>
+              <a:rPr lang="es-ES" sz="4000" dirty="0" err="1"/>
+              <a:t>Accuracy-Flexibility</a:t>
+            </a:r>
+            <a:r>
+              <a:rPr lang="es-ES" sz="4000" dirty="0"/>
+              <a:t> </a:t>
+            </a:r>
+            <a:r>
+              <a:rPr lang="es-ES" sz="4000" dirty="0" err="1"/>
+              <a:t>trade</a:t>
+            </a:r>
+            <a:r>
+              <a:rPr lang="es-ES" sz="4000" dirty="0"/>
+              <a:t>-off</a:t>
+            </a:r>
+            <a:endParaRPr lang="en-US" sz="4000" dirty="0"/>
+          </a:p>
+        </p:txBody>
+      </p:sp>
+      <p:sp>
+        <p:nvSpPr>
           <p:cNvPr id="3" name="Content Placeholder 2">
             <a:extLst>
               <a:ext uri="{FF2B5EF4-FFF2-40B4-BE49-F238E27FC236}">
@@ -23237,7 +24004,7 @@
               <a:rPr lang="en-US" sz="2400" dirty="0">
                 <a:latin typeface="+mj-lt"/>
               </a:rPr>
-              <a:t>When prediction (forecasting) is the goal, interpretability is not important, and very flexible algorithms are preferred….</a:t>
+              <a:t>When prediction (forecasting) is the goal, interpretability is not that important, and very flexible algorithms are preferred….</a:t>
             </a:r>
           </a:p>
           <a:p>
@@ -23623,7 +24390,7 @@
 </p:sld>
 </file>
 
-<file path=ppt/slides/slide14.xml><?xml version="1.0" encoding="utf-8"?>
+<file path=ppt/slides/slide15.xml><?xml version="1.0" encoding="utf-8"?>
 <p:sld xmlns:a="http://schemas.openxmlformats.org/drawingml/2006/main" xmlns:r="http://schemas.openxmlformats.org/officeDocument/2006/relationships" xmlns:p="http://schemas.openxmlformats.org/presentationml/2006/main">
   <p:cSld>
     <p:spTree>
@@ -23752,7 +24519,7 @@
               <a:rPr lang="en-US" sz="2400" dirty="0">
                 <a:latin typeface="+mj-lt"/>
               </a:rPr>
-              <a:t> means to what extent the fitting would change if a different dataset was used. Ideally, the estimate should not vary too much between datasets. However, if a method has high variance, small changes in the training data can result in large changes in the fitting. </a:t>
+              <a:t> means to what extent the fitting would change if a different dataset was used. Ideally, the estimate should not vary too much between datasets. However, if a method has high variance, small changes in the training data can result in large changes in the fitting. (Think about its similarity with OLS estimators)</a:t>
             </a:r>
           </a:p>
           <a:p>
@@ -24132,7 +24899,7 @@
 </p:sld>
 </file>
 
-<file path=ppt/slides/slide15.xml><?xml version="1.0" encoding="utf-8"?>
+<file path=ppt/slides/slide16.xml><?xml version="1.0" encoding="utf-8"?>
 <p:sld xmlns:a="http://schemas.openxmlformats.org/drawingml/2006/main" xmlns:r="http://schemas.openxmlformats.org/officeDocument/2006/relationships" xmlns:p="http://schemas.openxmlformats.org/presentationml/2006/main">
   <p:cSld>
     <p:spTree>
@@ -24261,7 +25028,19 @@
               <a:rPr lang="en-US" sz="2400" dirty="0">
                 <a:latin typeface="+mj-lt"/>
               </a:rPr>
-              <a:t>In other words, if a relationship is not linear, no matter how many observations we provide, the model will significantly fail. It won’t be accurate.</a:t>
+              <a:t>In other words, if a relationship is not of that nature specified (linear, let’s say), no matter how many observations we provide, the model will largely fail. It won’t be </a:t>
+            </a:r>
+            <a:r>
+              <a:rPr lang="en-US" sz="2400" b="1" dirty="0">
+                <a:latin typeface="+mj-lt"/>
+              </a:rPr>
+              <a:t>accurate</a:t>
+            </a:r>
+            <a:r>
+              <a:rPr lang="en-US" sz="2400" dirty="0">
+                <a:latin typeface="+mj-lt"/>
+              </a:rPr>
+              <a:t>.</a:t>
             </a:r>
           </a:p>
           <a:p>
@@ -24626,7 +25405,7 @@
 </p:sld>
 </file>
 
-<file path=ppt/slides/slide16.xml><?xml version="1.0" encoding="utf-8"?>
+<file path=ppt/slides/slide17.xml><?xml version="1.0" encoding="utf-8"?>
 <p:sld xmlns:a="http://schemas.openxmlformats.org/drawingml/2006/main" xmlns:r="http://schemas.openxmlformats.org/officeDocument/2006/relationships" xmlns:p="http://schemas.openxmlformats.org/presentationml/2006/main">
   <p:cSld>
     <p:spTree>
@@ -24743,8 +25522,43 @@
               <a:rPr lang="en-US" sz="2400" dirty="0">
                 <a:latin typeface="+mj-lt"/>
               </a:rPr>
-              <a:t>In other words, accurate models do not generalize well. Flexible models miss a lot in new observations.</a:t>
-            </a:r>
+              <a:t>In other words, </a:t>
+            </a:r>
+            <a:r>
+              <a:rPr lang="en-US" sz="2400" b="1" dirty="0">
+                <a:latin typeface="+mj-lt"/>
+              </a:rPr>
+              <a:t>accurate models do not generalize well</a:t>
+            </a:r>
+            <a:r>
+              <a:rPr lang="en-US" sz="2400" dirty="0">
+                <a:latin typeface="+mj-lt"/>
+              </a:rPr>
+              <a:t>, while </a:t>
+            </a:r>
+            <a:r>
+              <a:rPr lang="en-US" sz="2400" b="1" dirty="0">
+                <a:latin typeface="+mj-lt"/>
+              </a:rPr>
+              <a:t>flexible models miss a lot in new observations</a:t>
+            </a:r>
+            <a:r>
+              <a:rPr lang="en-US" sz="2400" dirty="0">
+                <a:latin typeface="+mj-lt"/>
+              </a:rPr>
+              <a:t>.</a:t>
+            </a:r>
+          </a:p>
+          <a:p>
+            <a:pPr marL="0" indent="0">
+              <a:lnSpc>
+                <a:spcPct val="100000"/>
+              </a:lnSpc>
+              <a:buNone/>
+            </a:pPr>
+            <a:endParaRPr lang="en-US" sz="2400" dirty="0">
+              <a:latin typeface="+mj-lt"/>
+            </a:endParaRPr>
           </a:p>
           <a:p>
             <a:pPr>
@@ -24754,35 +25568,12 @@
               <a:buFont typeface="Wingdings" panose="05000000000000000000" pitchFamily="2" charset="2"/>
               <a:buChar char="§"/>
             </a:pPr>
-            <a:endParaRPr lang="en-US" sz="2400" dirty="0">
-              <a:latin typeface="+mj-lt"/>
-            </a:endParaRPr>
-          </a:p>
-          <a:p>
-            <a:pPr marL="0" indent="0" algn="ctr">
-              <a:lnSpc>
-                <a:spcPct val="100000"/>
-              </a:lnSpc>
-              <a:buNone/>
-            </a:pPr>
-            <a:r>
-              <a:rPr lang="en-US" sz="2400" i="1" dirty="0">
+            <a:r>
+              <a:rPr lang="en-US" sz="2400" dirty="0">
                 <a:latin typeface="+mj-lt"/>
               </a:rPr>
-              <a:t>A tailor-made suit fits you perfectly, but probably won’t fit anybody else well. A general cheap suit, will fit everybody.</a:t>
-            </a:r>
-          </a:p>
-          <a:p>
-            <a:pPr>
-              <a:lnSpc>
-                <a:spcPct val="100000"/>
-              </a:lnSpc>
-              <a:buFont typeface="Wingdings" panose="05000000000000000000" pitchFamily="2" charset="2"/>
-              <a:buChar char="§"/>
-            </a:pPr>
-            <a:endParaRPr lang="en-US" sz="2400" dirty="0">
-              <a:latin typeface="+mj-lt"/>
-            </a:endParaRPr>
+              <a:t>Rigid and accurate in opposition to flexible but non-accurate… You cannot get both… or can you?</a:t>
+            </a:r>
           </a:p>
         </p:txBody>
       </p:sp>
@@ -25134,7 +25925,498 @@
 </p:sld>
 </file>
 
-<file path=ppt/slides/slide17.xml><?xml version="1.0" encoding="utf-8"?>
+<file path=ppt/slides/slide18.xml><?xml version="1.0" encoding="utf-8"?>
+<p:sld xmlns:a="http://schemas.openxmlformats.org/drawingml/2006/main" xmlns:r="http://schemas.openxmlformats.org/officeDocument/2006/relationships" xmlns:p="http://schemas.openxmlformats.org/presentationml/2006/main">
+  <p:cSld>
+    <p:spTree>
+      <p:nvGrpSpPr>
+        <p:cNvPr id="1" name=""/>
+        <p:cNvGrpSpPr/>
+        <p:nvPr/>
+      </p:nvGrpSpPr>
+      <p:grpSpPr>
+        <a:xfrm>
+          <a:off x="0" y="0"/>
+          <a:ext cx="0" cy="0"/>
+          <a:chOff x="0" y="0"/>
+          <a:chExt cx="0" cy="0"/>
+        </a:xfrm>
+      </p:grpSpPr>
+      <p:sp>
+        <p:nvSpPr>
+          <p:cNvPr id="2" name="Title 1">
+            <a:extLst>
+              <a:ext uri="{FF2B5EF4-FFF2-40B4-BE49-F238E27FC236}">
+                <a16:creationId xmlns:a16="http://schemas.microsoft.com/office/drawing/2014/main" id="{F140273F-00A5-2CDE-5EC1-05720B283B27}"/>
+              </a:ext>
+            </a:extLst>
+          </p:cNvPr>
+          <p:cNvSpPr>
+            <a:spLocks noGrp="1"/>
+          </p:cNvSpPr>
+          <p:nvPr>
+            <p:ph type="title"/>
+          </p:nvPr>
+        </p:nvSpPr>
+        <p:spPr/>
+        <p:txBody>
+          <a:bodyPr>
+            <a:normAutofit/>
+          </a:bodyPr>
+          <a:lstStyle/>
+          <a:p>
+            <a:r>
+              <a:rPr lang="es-ES" sz="4000" dirty="0" err="1"/>
+              <a:t>The</a:t>
+            </a:r>
+            <a:r>
+              <a:rPr lang="es-ES" sz="4000" dirty="0"/>
+              <a:t> </a:t>
+            </a:r>
+            <a:r>
+              <a:rPr lang="es-ES" sz="4000" dirty="0" err="1"/>
+              <a:t>Bias-Variance</a:t>
+            </a:r>
+            <a:r>
+              <a:rPr lang="es-ES" sz="4000" dirty="0"/>
+              <a:t> </a:t>
+            </a:r>
+            <a:r>
+              <a:rPr lang="es-ES" sz="4000" dirty="0" err="1"/>
+              <a:t>trade</a:t>
+            </a:r>
+            <a:r>
+              <a:rPr lang="es-ES" sz="4000" dirty="0"/>
+              <a:t>-off</a:t>
+            </a:r>
+            <a:endParaRPr lang="en-US" sz="4000" dirty="0"/>
+          </a:p>
+        </p:txBody>
+      </p:sp>
+      <p:sp>
+        <p:nvSpPr>
+          <p:cNvPr id="3" name="Content Placeholder 2">
+            <a:extLst>
+              <a:ext uri="{FF2B5EF4-FFF2-40B4-BE49-F238E27FC236}">
+                <a16:creationId xmlns:a16="http://schemas.microsoft.com/office/drawing/2014/main" id="{7035E4AA-6F11-BAE1-CC1D-242A88A33FB9}"/>
+              </a:ext>
+            </a:extLst>
+          </p:cNvPr>
+          <p:cNvSpPr>
+            <a:spLocks noGrp="1"/>
+          </p:cNvSpPr>
+          <p:nvPr>
+            <p:ph idx="1"/>
+          </p:nvPr>
+        </p:nvSpPr>
+        <p:spPr/>
+        <p:txBody>
+          <a:bodyPr>
+            <a:normAutofit/>
+          </a:bodyPr>
+          <a:lstStyle/>
+          <a:p>
+            <a:pPr>
+              <a:lnSpc>
+                <a:spcPct val="100000"/>
+              </a:lnSpc>
+              <a:buFont typeface="Wingdings" panose="05000000000000000000" pitchFamily="2" charset="2"/>
+              <a:buChar char="§"/>
+            </a:pPr>
+            <a:r>
+              <a:rPr lang="en-US" sz="2400" dirty="0">
+                <a:latin typeface="+mj-lt"/>
+              </a:rPr>
+              <a:t>You can’t, but you may reach a reasonable compromise</a:t>
+            </a:r>
+          </a:p>
+        </p:txBody>
+      </p:sp>
+      <p:sp>
+        <p:nvSpPr>
+          <p:cNvPr id="4" name="Rectángulo 3">
+            <a:extLst>
+              <a:ext uri="{FF2B5EF4-FFF2-40B4-BE49-F238E27FC236}">
+                <a16:creationId xmlns:a16="http://schemas.microsoft.com/office/drawing/2014/main" id="{2D452C83-A2F9-2908-46B1-0DCFA9342F79}"/>
+              </a:ext>
+            </a:extLst>
+          </p:cNvPr>
+          <p:cNvSpPr/>
+          <p:nvPr/>
+        </p:nvSpPr>
+        <p:spPr>
+          <a:xfrm>
+            <a:off x="0" y="0"/>
+            <a:ext cx="374469" cy="6858000"/>
+          </a:xfrm>
+          <a:prstGeom prst="rect">
+            <a:avLst/>
+          </a:prstGeom>
+        </p:spPr>
+        <p:style>
+          <a:lnRef idx="2">
+            <a:schemeClr val="accent2">
+              <a:shade val="50000"/>
+            </a:schemeClr>
+          </a:lnRef>
+          <a:fillRef idx="1">
+            <a:schemeClr val="accent2"/>
+          </a:fillRef>
+          <a:effectRef idx="0">
+            <a:schemeClr val="accent2"/>
+          </a:effectRef>
+          <a:fontRef idx="minor">
+            <a:schemeClr val="lt1"/>
+          </a:fontRef>
+        </p:style>
+        <p:txBody>
+          <a:bodyPr rtlCol="0" anchor="ctr"/>
+          <a:lstStyle/>
+          <a:p>
+            <a:pPr algn="ctr"/>
+            <a:endParaRPr lang="es-ES"/>
+          </a:p>
+        </p:txBody>
+      </p:sp>
+      <p:sp>
+        <p:nvSpPr>
+          <p:cNvPr id="5" name="Rectangle 143">
+            <a:extLst>
+              <a:ext uri="{FF2B5EF4-FFF2-40B4-BE49-F238E27FC236}">
+                <a16:creationId xmlns:a16="http://schemas.microsoft.com/office/drawing/2014/main" id="{4730D885-E7EB-E846-1C03-40A873EC3209}"/>
+              </a:ext>
+            </a:extLst>
+          </p:cNvPr>
+          <p:cNvSpPr>
+            <a:spLocks noChangeArrowheads="1"/>
+          </p:cNvSpPr>
+          <p:nvPr/>
+        </p:nvSpPr>
+        <p:spPr bwMode="auto">
+          <a:xfrm>
+            <a:off x="448342" y="6401243"/>
+            <a:ext cx="5730175" cy="307777"/>
+          </a:xfrm>
+          <a:prstGeom prst="rect">
+            <a:avLst/>
+          </a:prstGeom>
+          <a:noFill/>
+          <a:ln>
+            <a:noFill/>
+          </a:ln>
+          <a:effectLst/>
+          <a:extLst>
+            <a:ext uri="{909E8E84-426E-40DD-AFC4-6F175D3DCCD1}">
+              <a14:hiddenFill xmlns:a14="http://schemas.microsoft.com/office/drawing/2010/main">
+                <a:solidFill>
+                  <a:schemeClr val="accent1"/>
+                </a:solidFill>
+              </a14:hiddenFill>
+            </a:ext>
+            <a:ext uri="{91240B29-F687-4F45-9708-019B960494DF}">
+              <a14:hiddenLine xmlns:a14="http://schemas.microsoft.com/office/drawing/2010/main" w="9525">
+                <a:solidFill>
+                  <a:schemeClr val="tx1"/>
+                </a:solidFill>
+                <a:miter lim="800000"/>
+                <a:headEnd/>
+                <a:tailEnd/>
+              </a14:hiddenLine>
+            </a:ext>
+            <a:ext uri="{AF507438-7753-43E0-B8FC-AC1667EBCBE1}">
+              <a14:hiddenEffects xmlns:a14="http://schemas.microsoft.com/office/drawing/2010/main">
+                <a:effectLst>
+                  <a:outerShdw dist="35921" dir="2700000" algn="ctr" rotWithShape="0">
+                    <a:schemeClr val="bg2"/>
+                  </a:outerShdw>
+                </a:effectLst>
+              </a14:hiddenEffects>
+            </a:ext>
+          </a:extLst>
+        </p:spPr>
+        <p:txBody>
+          <a:bodyPr vert="horz" wrap="square" lIns="91440" tIns="45720" rIns="91440" bIns="45720" numCol="1" anchor="ctr" anchorCtr="0" compatLnSpc="1">
+            <a:prstTxWarp prst="textNoShape">
+              <a:avLst/>
+            </a:prstTxWarp>
+            <a:spAutoFit/>
+          </a:bodyPr>
+          <a:lstStyle/>
+          <a:p>
+            <a:pPr marL="0" marR="0" lvl="0" indent="0" algn="l" defTabSz="914400" rtl="0" eaLnBrk="0" fontAlgn="base" latinLnBrk="0" hangingPunct="0">
+              <a:lnSpc>
+                <a:spcPct val="100000"/>
+              </a:lnSpc>
+              <a:spcBef>
+                <a:spcPct val="0"/>
+              </a:spcBef>
+              <a:spcAft>
+                <a:spcPct val="0"/>
+              </a:spcAft>
+              <a:buClrTx/>
+              <a:buSzTx/>
+              <a:buFontTx/>
+              <a:buNone/>
+              <a:tabLst/>
+            </a:pPr>
+            <a:r>
+              <a:rPr kumimoji="0" lang="en-US" altLang="es-ES" sz="1400" b="0" i="0" u="none" strike="noStrike" cap="none" normalizeH="0" baseline="0" dirty="0">
+                <a:ln>
+                  <a:noFill/>
+                </a:ln>
+                <a:solidFill>
+                  <a:srgbClr val="F4A200"/>
+                </a:solidFill>
+                <a:effectLst/>
+                <a:latin typeface="Arial" panose="020B0604020202020204" pitchFamily="34" charset="0"/>
+                <a:ea typeface="Myriad Pro Light"/>
+                <a:cs typeface="Times New Roman" panose="02020603050405020304" pitchFamily="18" charset="0"/>
+              </a:rPr>
+              <a:t>Master in Quantitative Economic Analysis </a:t>
+            </a:r>
+            <a:r>
+              <a:rPr kumimoji="0" lang="en-US" altLang="es-ES" sz="1400" b="0" i="0" u="none" strike="noStrike" cap="none" normalizeH="0" baseline="0" dirty="0" err="1">
+                <a:ln>
+                  <a:noFill/>
+                </a:ln>
+                <a:solidFill>
+                  <a:srgbClr val="F4A200"/>
+                </a:solidFill>
+                <a:effectLst/>
+                <a:latin typeface="Arial" panose="020B0604020202020204" pitchFamily="34" charset="0"/>
+                <a:ea typeface="Myriad Pro Light"/>
+                <a:cs typeface="Times New Roman" panose="02020603050405020304" pitchFamily="18" charset="0"/>
+              </a:rPr>
+              <a:t>MQuEA</a:t>
+            </a:r>
+            <a:endParaRPr kumimoji="0" lang="es-ES" altLang="es-ES" sz="500" b="0" i="0" u="none" strike="noStrike" cap="none" normalizeH="0" baseline="0" dirty="0">
+              <a:ln>
+                <a:noFill/>
+              </a:ln>
+              <a:solidFill>
+                <a:schemeClr val="tx1"/>
+              </a:solidFill>
+              <a:effectLst/>
+              <a:latin typeface="Arial" panose="020B0604020202020204" pitchFamily="34" charset="0"/>
+            </a:endParaRPr>
+          </a:p>
+        </p:txBody>
+      </p:sp>
+      <p:sp>
+        <p:nvSpPr>
+          <p:cNvPr id="6" name="Rectangle 143">
+            <a:extLst>
+              <a:ext uri="{FF2B5EF4-FFF2-40B4-BE49-F238E27FC236}">
+                <a16:creationId xmlns:a16="http://schemas.microsoft.com/office/drawing/2014/main" id="{FAB3B03A-558F-7DDE-F946-6CF9F25B0574}"/>
+              </a:ext>
+            </a:extLst>
+          </p:cNvPr>
+          <p:cNvSpPr>
+            <a:spLocks noChangeArrowheads="1"/>
+          </p:cNvSpPr>
+          <p:nvPr/>
+        </p:nvSpPr>
+        <p:spPr bwMode="auto">
+          <a:xfrm>
+            <a:off x="6186394" y="6411881"/>
+            <a:ext cx="5730175" cy="307777"/>
+          </a:xfrm>
+          <a:prstGeom prst="rect">
+            <a:avLst/>
+          </a:prstGeom>
+          <a:noFill/>
+          <a:ln>
+            <a:noFill/>
+          </a:ln>
+          <a:effectLst/>
+          <a:extLst>
+            <a:ext uri="{909E8E84-426E-40DD-AFC4-6F175D3DCCD1}">
+              <a14:hiddenFill xmlns:a14="http://schemas.microsoft.com/office/drawing/2010/main">
+                <a:solidFill>
+                  <a:schemeClr val="accent1"/>
+                </a:solidFill>
+              </a14:hiddenFill>
+            </a:ext>
+            <a:ext uri="{91240B29-F687-4F45-9708-019B960494DF}">
+              <a14:hiddenLine xmlns:a14="http://schemas.microsoft.com/office/drawing/2010/main" w="9525">
+                <a:solidFill>
+                  <a:schemeClr val="tx1"/>
+                </a:solidFill>
+                <a:miter lim="800000"/>
+                <a:headEnd/>
+                <a:tailEnd/>
+              </a14:hiddenLine>
+            </a:ext>
+            <a:ext uri="{AF507438-7753-43E0-B8FC-AC1667EBCBE1}">
+              <a14:hiddenEffects xmlns:a14="http://schemas.microsoft.com/office/drawing/2010/main">
+                <a:effectLst>
+                  <a:outerShdw dist="35921" dir="2700000" algn="ctr" rotWithShape="0">
+                    <a:schemeClr val="bg2"/>
+                  </a:outerShdw>
+                </a:effectLst>
+              </a14:hiddenEffects>
+            </a:ext>
+          </a:extLst>
+        </p:spPr>
+        <p:txBody>
+          <a:bodyPr vert="horz" wrap="square" lIns="91440" tIns="45720" rIns="91440" bIns="45720" numCol="1" anchor="ctr" anchorCtr="0" compatLnSpc="1">
+            <a:prstTxWarp prst="textNoShape">
+              <a:avLst/>
+            </a:prstTxWarp>
+            <a:spAutoFit/>
+          </a:bodyPr>
+          <a:lstStyle/>
+          <a:p>
+            <a:pPr marL="0" marR="0" lvl="0" indent="0" algn="r" defTabSz="914400" rtl="0" eaLnBrk="0" fontAlgn="base" latinLnBrk="0" hangingPunct="0">
+              <a:lnSpc>
+                <a:spcPct val="100000"/>
+              </a:lnSpc>
+              <a:spcBef>
+                <a:spcPct val="0"/>
+              </a:spcBef>
+              <a:spcAft>
+                <a:spcPct val="0"/>
+              </a:spcAft>
+              <a:buClrTx/>
+              <a:buSzTx/>
+              <a:buFontTx/>
+              <a:buNone/>
+              <a:tabLst/>
+            </a:pPr>
+            <a:r>
+              <a:rPr kumimoji="0" lang="en-US" altLang="es-ES" sz="1400" b="0" i="0" u="none" strike="noStrike" cap="none" normalizeH="0" baseline="0" dirty="0">
+                <a:ln>
+                  <a:noFill/>
+                </a:ln>
+                <a:solidFill>
+                  <a:srgbClr val="F4A200"/>
+                </a:solidFill>
+                <a:effectLst/>
+                <a:latin typeface="Arial" panose="020B0604020202020204" pitchFamily="34" charset="0"/>
+                <a:ea typeface="Myriad Pro Light"/>
+                <a:cs typeface="Times New Roman" panose="02020603050405020304" pitchFamily="18" charset="0"/>
+              </a:rPr>
+              <a:t>Universidad </a:t>
+            </a:r>
+            <a:r>
+              <a:rPr kumimoji="0" lang="en-US" altLang="es-ES" sz="1400" b="0" i="0" u="none" strike="noStrike" cap="none" normalizeH="0" baseline="0" dirty="0" err="1">
+                <a:ln>
+                  <a:noFill/>
+                </a:ln>
+                <a:solidFill>
+                  <a:srgbClr val="F4A200"/>
+                </a:solidFill>
+                <a:effectLst/>
+                <a:latin typeface="Arial" panose="020B0604020202020204" pitchFamily="34" charset="0"/>
+                <a:ea typeface="Myriad Pro Light"/>
+                <a:cs typeface="Times New Roman" panose="02020603050405020304" pitchFamily="18" charset="0"/>
+              </a:rPr>
+              <a:t>Aut</a:t>
+            </a:r>
+            <a:r>
+              <a:rPr lang="en-US" altLang="es-ES" sz="1400" dirty="0" err="1">
+                <a:solidFill>
+                  <a:srgbClr val="F4A200"/>
+                </a:solidFill>
+                <a:latin typeface="Arial" panose="020B0604020202020204" pitchFamily="34" charset="0"/>
+                <a:ea typeface="Myriad Pro Light"/>
+                <a:cs typeface="Times New Roman" panose="02020603050405020304" pitchFamily="18" charset="0"/>
+              </a:rPr>
+              <a:t>ó</a:t>
+            </a:r>
+            <a:r>
+              <a:rPr kumimoji="0" lang="en-US" altLang="es-ES" sz="1400" b="0" i="0" u="none" strike="noStrike" cap="none" normalizeH="0" baseline="0" dirty="0" err="1">
+                <a:ln>
+                  <a:noFill/>
+                </a:ln>
+                <a:solidFill>
+                  <a:srgbClr val="F4A200"/>
+                </a:solidFill>
+                <a:effectLst/>
+                <a:latin typeface="Arial" panose="020B0604020202020204" pitchFamily="34" charset="0"/>
+                <a:ea typeface="Myriad Pro Light"/>
+                <a:cs typeface="Times New Roman" panose="02020603050405020304" pitchFamily="18" charset="0"/>
+              </a:rPr>
+              <a:t>noma</a:t>
+            </a:r>
+            <a:r>
+              <a:rPr kumimoji="0" lang="en-US" altLang="es-ES" sz="1400" b="0" i="0" u="none" strike="noStrike" cap="none" normalizeH="0" baseline="0" dirty="0">
+                <a:ln>
+                  <a:noFill/>
+                </a:ln>
+                <a:solidFill>
+                  <a:srgbClr val="F4A200"/>
+                </a:solidFill>
+                <a:effectLst/>
+                <a:latin typeface="Arial" panose="020B0604020202020204" pitchFamily="34" charset="0"/>
+                <a:ea typeface="Myriad Pro Light"/>
+                <a:cs typeface="Times New Roman" panose="02020603050405020304" pitchFamily="18" charset="0"/>
+              </a:rPr>
+              <a:t> de Madrid</a:t>
+            </a:r>
+            <a:endParaRPr kumimoji="0" lang="es-ES" altLang="es-ES" sz="500" b="0" i="0" u="none" strike="noStrike" cap="none" normalizeH="0" baseline="0" dirty="0">
+              <a:ln>
+                <a:noFill/>
+              </a:ln>
+              <a:solidFill>
+                <a:schemeClr val="tx1"/>
+              </a:solidFill>
+              <a:effectLst/>
+              <a:latin typeface="Arial" panose="020B0604020202020204" pitchFamily="34" charset="0"/>
+            </a:endParaRPr>
+          </a:p>
+        </p:txBody>
+      </p:sp>
+      <p:pic>
+        <p:nvPicPr>
+          <p:cNvPr id="8" name="Picture 7" descr="A diagram of a trade off&#10;&#10;Description automatically generated">
+            <a:extLst>
+              <a:ext uri="{FF2B5EF4-FFF2-40B4-BE49-F238E27FC236}">
+                <a16:creationId xmlns:a16="http://schemas.microsoft.com/office/drawing/2014/main" id="{FD52F510-0239-0B53-03EE-845B2631F465}"/>
+              </a:ext>
+            </a:extLst>
+          </p:cNvPr>
+          <p:cNvPicPr>
+            <a:picLocks noChangeAspect="1"/>
+          </p:cNvPicPr>
+          <p:nvPr/>
+        </p:nvPicPr>
+        <p:blipFill>
+          <a:blip r:embed="rId2">
+            <a:extLst>
+              <a:ext uri="{28A0092B-C50C-407E-A947-70E740481C1C}">
+                <a14:useLocalDpi xmlns:a14="http://schemas.microsoft.com/office/drawing/2010/main" val="0"/>
+              </a:ext>
+            </a:extLst>
+          </a:blip>
+          <a:stretch>
+            <a:fillRect/>
+          </a:stretch>
+        </p:blipFill>
+        <p:spPr>
+          <a:xfrm>
+            <a:off x="3377285" y="2359529"/>
+            <a:ext cx="5437429" cy="4206240"/>
+          </a:xfrm>
+          <a:prstGeom prst="rect">
+            <a:avLst/>
+          </a:prstGeom>
+        </p:spPr>
+      </p:pic>
+    </p:spTree>
+    <p:extLst>
+      <p:ext uri="{BB962C8B-B14F-4D97-AF65-F5344CB8AC3E}">
+        <p14:creationId xmlns:p14="http://schemas.microsoft.com/office/powerpoint/2010/main" val="2486130316"/>
+      </p:ext>
+    </p:extLst>
+  </p:cSld>
+  <p:clrMapOvr>
+    <a:masterClrMapping/>
+  </p:clrMapOvr>
+</p:sld>
+</file>
+
+<file path=ppt/slides/slide19.xml><?xml version="1.0" encoding="utf-8"?>
 <p:sld xmlns:a="http://schemas.openxmlformats.org/drawingml/2006/main" xmlns:r="http://schemas.openxmlformats.org/officeDocument/2006/relationships" xmlns:p="http://schemas.openxmlformats.org/presentationml/2006/main">
   <p:cSld>
     <p:spTree>
@@ -26011,644 +27293,6 @@
 </p:sld>
 </file>
 
-<file path=ppt/slides/slide18.xml><?xml version="1.0" encoding="utf-8"?>
-<p:sld xmlns:a="http://schemas.openxmlformats.org/drawingml/2006/main" xmlns:r="http://schemas.openxmlformats.org/officeDocument/2006/relationships" xmlns:p="http://schemas.openxmlformats.org/presentationml/2006/main">
-  <p:cSld>
-    <p:spTree>
-      <p:nvGrpSpPr>
-        <p:cNvPr id="1" name=""/>
-        <p:cNvGrpSpPr/>
-        <p:nvPr/>
-      </p:nvGrpSpPr>
-      <p:grpSpPr>
-        <a:xfrm>
-          <a:off x="0" y="0"/>
-          <a:ext cx="0" cy="0"/>
-          <a:chOff x="0" y="0"/>
-          <a:chExt cx="0" cy="0"/>
-        </a:xfrm>
-      </p:grpSpPr>
-      <p:sp>
-        <p:nvSpPr>
-          <p:cNvPr id="2" name="Title 1">
-            <a:extLst>
-              <a:ext uri="{FF2B5EF4-FFF2-40B4-BE49-F238E27FC236}">
-                <a16:creationId xmlns:a16="http://schemas.microsoft.com/office/drawing/2014/main" id="{F140273F-00A5-2CDE-5EC1-05720B283B27}"/>
-              </a:ext>
-            </a:extLst>
-          </p:cNvPr>
-          <p:cNvSpPr>
-            <a:spLocks noGrp="1"/>
-          </p:cNvSpPr>
-          <p:nvPr>
-            <p:ph type="title"/>
-          </p:nvPr>
-        </p:nvSpPr>
-        <p:spPr/>
-        <p:txBody>
-          <a:bodyPr>
-            <a:normAutofit/>
-          </a:bodyPr>
-          <a:lstStyle/>
-          <a:p>
-            <a:r>
-              <a:rPr lang="es-ES" sz="4000" dirty="0" err="1"/>
-              <a:t>Take</a:t>
-            </a:r>
-            <a:r>
-              <a:rPr lang="es-ES" sz="4000" dirty="0"/>
-              <a:t>-home </a:t>
-            </a:r>
-            <a:r>
-              <a:rPr lang="es-ES" sz="4000" dirty="0" err="1"/>
-              <a:t>messages</a:t>
-            </a:r>
-            <a:endParaRPr lang="en-US" sz="4000" dirty="0"/>
-          </a:p>
-        </p:txBody>
-      </p:sp>
-      <p:sp>
-        <p:nvSpPr>
-          <p:cNvPr id="3" name="Content Placeholder 2">
-            <a:extLst>
-              <a:ext uri="{FF2B5EF4-FFF2-40B4-BE49-F238E27FC236}">
-                <a16:creationId xmlns:a16="http://schemas.microsoft.com/office/drawing/2014/main" id="{7035E4AA-6F11-BAE1-CC1D-242A88A33FB9}"/>
-              </a:ext>
-            </a:extLst>
-          </p:cNvPr>
-          <p:cNvSpPr>
-            <a:spLocks noGrp="1"/>
-          </p:cNvSpPr>
-          <p:nvPr>
-            <p:ph idx="1"/>
-          </p:nvPr>
-        </p:nvSpPr>
-        <p:spPr/>
-        <p:txBody>
-          <a:bodyPr>
-            <a:normAutofit fontScale="92500" lnSpcReduction="20000"/>
-          </a:bodyPr>
-          <a:lstStyle/>
-          <a:p>
-            <a:pPr>
-              <a:lnSpc>
-                <a:spcPct val="120000"/>
-              </a:lnSpc>
-              <a:buFont typeface="Wingdings" panose="05000000000000000000" pitchFamily="2" charset="2"/>
-              <a:buChar char="§"/>
-            </a:pPr>
-            <a:r>
-              <a:rPr lang="en-US" sz="2000" dirty="0">
-                <a:latin typeface="+mj-lt"/>
-              </a:rPr>
-              <a:t>ML is about making computers getting better at some tasks by </a:t>
-            </a:r>
-            <a:r>
-              <a:rPr lang="en-US" sz="2000" b="1" dirty="0">
-                <a:latin typeface="+mj-lt"/>
-              </a:rPr>
-              <a:t>learning from data </a:t>
-            </a:r>
-            <a:r>
-              <a:rPr lang="en-US" sz="2000" dirty="0">
-                <a:latin typeface="+mj-lt"/>
-              </a:rPr>
-              <a:t>instead of coding specific rules</a:t>
-            </a:r>
-          </a:p>
-          <a:p>
-            <a:pPr>
-              <a:lnSpc>
-                <a:spcPct val="120000"/>
-              </a:lnSpc>
-              <a:buFont typeface="Wingdings" panose="05000000000000000000" pitchFamily="2" charset="2"/>
-              <a:buChar char="§"/>
-            </a:pPr>
-            <a:r>
-              <a:rPr lang="en-US" sz="2000" dirty="0">
-                <a:latin typeface="+mj-lt"/>
-              </a:rPr>
-              <a:t>There are many different ML systems: supervised or not, batch or online, instance-based or model-based</a:t>
-            </a:r>
-          </a:p>
-          <a:p>
-            <a:pPr>
-              <a:lnSpc>
-                <a:spcPct val="120000"/>
-              </a:lnSpc>
-              <a:buFont typeface="Wingdings" panose="05000000000000000000" pitchFamily="2" charset="2"/>
-              <a:buChar char="§"/>
-            </a:pPr>
-            <a:r>
-              <a:rPr lang="en-US" sz="2000" b="1" dirty="0">
-                <a:latin typeface="+mj-lt"/>
-              </a:rPr>
-              <a:t>Non-parametric</a:t>
-            </a:r>
-            <a:r>
-              <a:rPr lang="en-US" sz="2000" dirty="0">
-                <a:latin typeface="+mj-lt"/>
-              </a:rPr>
-              <a:t> models have parameters that cannot be learnt from the data. These methods need to be </a:t>
-            </a:r>
-            <a:r>
-              <a:rPr lang="en-US" sz="2000" b="1" dirty="0">
-                <a:latin typeface="+mj-lt"/>
-              </a:rPr>
-              <a:t>tuned</a:t>
-            </a:r>
-            <a:endParaRPr lang="en-US" sz="2000" dirty="0">
-              <a:latin typeface="+mj-lt"/>
-            </a:endParaRPr>
-          </a:p>
-          <a:p>
-            <a:pPr>
-              <a:lnSpc>
-                <a:spcPct val="120000"/>
-              </a:lnSpc>
-              <a:buFont typeface="Wingdings" panose="05000000000000000000" pitchFamily="2" charset="2"/>
-              <a:buChar char="§"/>
-            </a:pPr>
-            <a:r>
-              <a:rPr lang="en-US" sz="2000" dirty="0">
-                <a:latin typeface="+mj-lt"/>
-              </a:rPr>
-              <a:t>Algorithms learn from a </a:t>
-            </a:r>
-            <a:r>
-              <a:rPr lang="en-US" sz="2000" b="1" dirty="0">
-                <a:latin typeface="+mj-lt"/>
-              </a:rPr>
-              <a:t>training dataset</a:t>
-            </a:r>
-            <a:r>
-              <a:rPr lang="en-US" sz="2000" dirty="0">
-                <a:latin typeface="+mj-lt"/>
-              </a:rPr>
-              <a:t>. They are evaluated on new data, a </a:t>
-            </a:r>
-            <a:r>
-              <a:rPr lang="en-US" sz="2000" b="1" dirty="0">
-                <a:latin typeface="+mj-lt"/>
-              </a:rPr>
-              <a:t>testing dataset</a:t>
-            </a:r>
-            <a:endParaRPr lang="en-US" sz="2000" dirty="0">
-              <a:latin typeface="+mj-lt"/>
-            </a:endParaRPr>
-          </a:p>
-          <a:p>
-            <a:pPr>
-              <a:lnSpc>
-                <a:spcPct val="120000"/>
-              </a:lnSpc>
-              <a:buFont typeface="Wingdings" panose="05000000000000000000" pitchFamily="2" charset="2"/>
-              <a:buChar char="§"/>
-            </a:pPr>
-            <a:r>
-              <a:rPr lang="en-US" sz="2000" b="1" dirty="0">
-                <a:latin typeface="+mj-lt"/>
-              </a:rPr>
-              <a:t>Flexible </a:t>
-            </a:r>
-            <a:r>
-              <a:rPr lang="en-US" sz="2000" dirty="0">
-                <a:latin typeface="+mj-lt"/>
-              </a:rPr>
-              <a:t>models can adapt better to any data structure but are less </a:t>
-            </a:r>
-            <a:r>
-              <a:rPr lang="en-US" sz="2000" b="1" dirty="0">
-                <a:latin typeface="+mj-lt"/>
-              </a:rPr>
-              <a:t>accurate</a:t>
-            </a:r>
-            <a:r>
-              <a:rPr lang="en-US" sz="2000" dirty="0">
-                <a:latin typeface="+mj-lt"/>
-              </a:rPr>
-              <a:t>. However, less flexible models are more </a:t>
-            </a:r>
-            <a:r>
-              <a:rPr lang="en-US" sz="2000" b="1" dirty="0">
-                <a:latin typeface="+mj-lt"/>
-              </a:rPr>
-              <a:t>interpretable</a:t>
-            </a:r>
-            <a:endParaRPr lang="en-US" sz="2000" dirty="0">
-              <a:latin typeface="+mj-lt"/>
-            </a:endParaRPr>
-          </a:p>
-          <a:p>
-            <a:pPr>
-              <a:lnSpc>
-                <a:spcPct val="120000"/>
-              </a:lnSpc>
-              <a:buFont typeface="Wingdings" panose="05000000000000000000" pitchFamily="2" charset="2"/>
-              <a:buChar char="§"/>
-            </a:pPr>
-            <a:r>
-              <a:rPr lang="en-US" sz="2000" b="1" dirty="0">
-                <a:latin typeface="+mj-lt"/>
-              </a:rPr>
-              <a:t>Variance </a:t>
-            </a:r>
-            <a:r>
-              <a:rPr lang="en-US" sz="2000" dirty="0">
-                <a:latin typeface="+mj-lt"/>
-              </a:rPr>
-              <a:t>in a model is a bad thing, but one cannot reduce it without increasing its </a:t>
-            </a:r>
-            <a:r>
-              <a:rPr lang="en-US" sz="2000" b="1" dirty="0">
-                <a:latin typeface="+mj-lt"/>
-              </a:rPr>
-              <a:t>bias </a:t>
-            </a:r>
-            <a:r>
-              <a:rPr lang="en-US" sz="2000" dirty="0">
-                <a:latin typeface="+mj-lt"/>
-              </a:rPr>
-              <a:t>(making more error)</a:t>
-            </a:r>
-          </a:p>
-          <a:p>
-            <a:pPr>
-              <a:lnSpc>
-                <a:spcPct val="120000"/>
-              </a:lnSpc>
-              <a:buFont typeface="Wingdings" panose="05000000000000000000" pitchFamily="2" charset="2"/>
-              <a:buChar char="§"/>
-            </a:pPr>
-            <a:r>
-              <a:rPr lang="en-US" sz="2000" dirty="0">
-                <a:latin typeface="+mj-lt"/>
-              </a:rPr>
-              <a:t>Challenges in ML practice are mainly related to data, and not that much to the methods</a:t>
-            </a:r>
-          </a:p>
-          <a:p>
-            <a:pPr>
-              <a:lnSpc>
-                <a:spcPct val="120000"/>
-              </a:lnSpc>
-              <a:buFont typeface="Wingdings" panose="05000000000000000000" pitchFamily="2" charset="2"/>
-              <a:buChar char="§"/>
-            </a:pPr>
-            <a:endParaRPr lang="en-US" sz="2000" dirty="0">
-              <a:latin typeface="+mj-lt"/>
-            </a:endParaRPr>
-          </a:p>
-        </p:txBody>
-      </p:sp>
-      <p:sp>
-        <p:nvSpPr>
-          <p:cNvPr id="4" name="Rectángulo 3">
-            <a:extLst>
-              <a:ext uri="{FF2B5EF4-FFF2-40B4-BE49-F238E27FC236}">
-                <a16:creationId xmlns:a16="http://schemas.microsoft.com/office/drawing/2014/main" id="{A1833D6E-EB66-4B08-6A71-A2490E5ED556}"/>
-              </a:ext>
-            </a:extLst>
-          </p:cNvPr>
-          <p:cNvSpPr/>
-          <p:nvPr/>
-        </p:nvSpPr>
-        <p:spPr>
-          <a:xfrm>
-            <a:off x="0" y="0"/>
-            <a:ext cx="374469" cy="6858000"/>
-          </a:xfrm>
-          <a:prstGeom prst="rect">
-            <a:avLst/>
-          </a:prstGeom>
-        </p:spPr>
-        <p:style>
-          <a:lnRef idx="2">
-            <a:schemeClr val="accent2">
-              <a:shade val="50000"/>
-            </a:schemeClr>
-          </a:lnRef>
-          <a:fillRef idx="1">
-            <a:schemeClr val="accent2"/>
-          </a:fillRef>
-          <a:effectRef idx="0">
-            <a:schemeClr val="accent2"/>
-          </a:effectRef>
-          <a:fontRef idx="minor">
-            <a:schemeClr val="lt1"/>
-          </a:fontRef>
-        </p:style>
-        <p:txBody>
-          <a:bodyPr rtlCol="0" anchor="ctr"/>
-          <a:lstStyle/>
-          <a:p>
-            <a:pPr algn="ctr"/>
-            <a:endParaRPr lang="es-ES"/>
-          </a:p>
-        </p:txBody>
-      </p:sp>
-      <p:sp>
-        <p:nvSpPr>
-          <p:cNvPr id="6" name="Rectangle 143">
-            <a:extLst>
-              <a:ext uri="{FF2B5EF4-FFF2-40B4-BE49-F238E27FC236}">
-                <a16:creationId xmlns:a16="http://schemas.microsoft.com/office/drawing/2014/main" id="{E26F5452-61B0-92E2-4D42-12B9B3E30BE5}"/>
-              </a:ext>
-            </a:extLst>
-          </p:cNvPr>
-          <p:cNvSpPr>
-            <a:spLocks noChangeArrowheads="1"/>
-          </p:cNvSpPr>
-          <p:nvPr/>
-        </p:nvSpPr>
-        <p:spPr bwMode="auto">
-          <a:xfrm>
-            <a:off x="448342" y="6401243"/>
-            <a:ext cx="5730175" cy="307777"/>
-          </a:xfrm>
-          <a:prstGeom prst="rect">
-            <a:avLst/>
-          </a:prstGeom>
-          <a:noFill/>
-          <a:ln>
-            <a:noFill/>
-          </a:ln>
-          <a:effectLst/>
-          <a:extLst>
-            <a:ext uri="{909E8E84-426E-40DD-AFC4-6F175D3DCCD1}">
-              <a14:hiddenFill xmlns:a14="http://schemas.microsoft.com/office/drawing/2010/main">
-                <a:solidFill>
-                  <a:schemeClr val="accent1"/>
-                </a:solidFill>
-              </a14:hiddenFill>
-            </a:ext>
-            <a:ext uri="{91240B29-F687-4F45-9708-019B960494DF}">
-              <a14:hiddenLine xmlns:a14="http://schemas.microsoft.com/office/drawing/2010/main" w="9525">
-                <a:solidFill>
-                  <a:schemeClr val="tx1"/>
-                </a:solidFill>
-                <a:miter lim="800000"/>
-                <a:headEnd/>
-                <a:tailEnd/>
-              </a14:hiddenLine>
-            </a:ext>
-            <a:ext uri="{AF507438-7753-43E0-B8FC-AC1667EBCBE1}">
-              <a14:hiddenEffects xmlns:a14="http://schemas.microsoft.com/office/drawing/2010/main">
-                <a:effectLst>
-                  <a:outerShdw dist="35921" dir="2700000" algn="ctr" rotWithShape="0">
-                    <a:schemeClr val="bg2"/>
-                  </a:outerShdw>
-                </a:effectLst>
-              </a14:hiddenEffects>
-            </a:ext>
-          </a:extLst>
-        </p:spPr>
-        <p:txBody>
-          <a:bodyPr vert="horz" wrap="square" lIns="91440" tIns="45720" rIns="91440" bIns="45720" numCol="1" anchor="ctr" anchorCtr="0" compatLnSpc="1">
-            <a:prstTxWarp prst="textNoShape">
-              <a:avLst/>
-            </a:prstTxWarp>
-            <a:spAutoFit/>
-          </a:bodyPr>
-          <a:lstStyle/>
-          <a:p>
-            <a:pPr marL="0" marR="0" lvl="0" indent="0" algn="l" defTabSz="914400" rtl="0" eaLnBrk="0" fontAlgn="base" latinLnBrk="0" hangingPunct="0">
-              <a:lnSpc>
-                <a:spcPct val="100000"/>
-              </a:lnSpc>
-              <a:spcBef>
-                <a:spcPct val="0"/>
-              </a:spcBef>
-              <a:spcAft>
-                <a:spcPct val="0"/>
-              </a:spcAft>
-              <a:buClrTx/>
-              <a:buSzTx/>
-              <a:buFontTx/>
-              <a:buNone/>
-              <a:tabLst/>
-            </a:pPr>
-            <a:r>
-              <a:rPr kumimoji="0" lang="en-US" altLang="es-ES" sz="1400" b="0" i="0" u="none" strike="noStrike" cap="none" normalizeH="0" baseline="0" dirty="0">
-                <a:ln>
-                  <a:noFill/>
-                </a:ln>
-                <a:solidFill>
-                  <a:srgbClr val="F4A200"/>
-                </a:solidFill>
-                <a:effectLst/>
-                <a:latin typeface="Arial" panose="020B0604020202020204" pitchFamily="34" charset="0"/>
-                <a:ea typeface="Myriad Pro Light"/>
-                <a:cs typeface="Times New Roman" panose="02020603050405020304" pitchFamily="18" charset="0"/>
-              </a:rPr>
-              <a:t>Master in Quantitative Economic Analysis </a:t>
-            </a:r>
-            <a:r>
-              <a:rPr kumimoji="0" lang="en-US" altLang="es-ES" sz="1400" b="0" i="0" u="none" strike="noStrike" cap="none" normalizeH="0" baseline="0" dirty="0" err="1">
-                <a:ln>
-                  <a:noFill/>
-                </a:ln>
-                <a:solidFill>
-                  <a:srgbClr val="F4A200"/>
-                </a:solidFill>
-                <a:effectLst/>
-                <a:latin typeface="Arial" panose="020B0604020202020204" pitchFamily="34" charset="0"/>
-                <a:ea typeface="Myriad Pro Light"/>
-                <a:cs typeface="Times New Roman" panose="02020603050405020304" pitchFamily="18" charset="0"/>
-              </a:rPr>
-              <a:t>MQuEA</a:t>
-            </a:r>
-            <a:endParaRPr kumimoji="0" lang="es-ES" altLang="es-ES" sz="500" b="0" i="0" u="none" strike="noStrike" cap="none" normalizeH="0" baseline="0" dirty="0">
-              <a:ln>
-                <a:noFill/>
-              </a:ln>
-              <a:solidFill>
-                <a:schemeClr val="tx1"/>
-              </a:solidFill>
-              <a:effectLst/>
-              <a:latin typeface="Arial" panose="020B0604020202020204" pitchFamily="34" charset="0"/>
-            </a:endParaRPr>
-          </a:p>
-        </p:txBody>
-      </p:sp>
-      <p:sp>
-        <p:nvSpPr>
-          <p:cNvPr id="7" name="Rectangle 143">
-            <a:extLst>
-              <a:ext uri="{FF2B5EF4-FFF2-40B4-BE49-F238E27FC236}">
-                <a16:creationId xmlns:a16="http://schemas.microsoft.com/office/drawing/2014/main" id="{E8592DDF-2019-6158-2EBA-F8DA5D07FB53}"/>
-              </a:ext>
-            </a:extLst>
-          </p:cNvPr>
-          <p:cNvSpPr>
-            <a:spLocks noChangeArrowheads="1"/>
-          </p:cNvSpPr>
-          <p:nvPr/>
-        </p:nvSpPr>
-        <p:spPr bwMode="auto">
-          <a:xfrm>
-            <a:off x="6186394" y="6411881"/>
-            <a:ext cx="5730175" cy="307777"/>
-          </a:xfrm>
-          <a:prstGeom prst="rect">
-            <a:avLst/>
-          </a:prstGeom>
-          <a:noFill/>
-          <a:ln>
-            <a:noFill/>
-          </a:ln>
-          <a:effectLst/>
-          <a:extLst>
-            <a:ext uri="{909E8E84-426E-40DD-AFC4-6F175D3DCCD1}">
-              <a14:hiddenFill xmlns:a14="http://schemas.microsoft.com/office/drawing/2010/main">
-                <a:solidFill>
-                  <a:schemeClr val="accent1"/>
-                </a:solidFill>
-              </a14:hiddenFill>
-            </a:ext>
-            <a:ext uri="{91240B29-F687-4F45-9708-019B960494DF}">
-              <a14:hiddenLine xmlns:a14="http://schemas.microsoft.com/office/drawing/2010/main" w="9525">
-                <a:solidFill>
-                  <a:schemeClr val="tx1"/>
-                </a:solidFill>
-                <a:miter lim="800000"/>
-                <a:headEnd/>
-                <a:tailEnd/>
-              </a14:hiddenLine>
-            </a:ext>
-            <a:ext uri="{AF507438-7753-43E0-B8FC-AC1667EBCBE1}">
-              <a14:hiddenEffects xmlns:a14="http://schemas.microsoft.com/office/drawing/2010/main">
-                <a:effectLst>
-                  <a:outerShdw dist="35921" dir="2700000" algn="ctr" rotWithShape="0">
-                    <a:schemeClr val="bg2"/>
-                  </a:outerShdw>
-                </a:effectLst>
-              </a14:hiddenEffects>
-            </a:ext>
-          </a:extLst>
-        </p:spPr>
-        <p:txBody>
-          <a:bodyPr vert="horz" wrap="square" lIns="91440" tIns="45720" rIns="91440" bIns="45720" numCol="1" anchor="ctr" anchorCtr="0" compatLnSpc="1">
-            <a:prstTxWarp prst="textNoShape">
-              <a:avLst/>
-            </a:prstTxWarp>
-            <a:spAutoFit/>
-          </a:bodyPr>
-          <a:lstStyle/>
-          <a:p>
-            <a:pPr marL="0" marR="0" lvl="0" indent="0" algn="r" defTabSz="914400" rtl="0" eaLnBrk="0" fontAlgn="base" latinLnBrk="0" hangingPunct="0">
-              <a:lnSpc>
-                <a:spcPct val="100000"/>
-              </a:lnSpc>
-              <a:spcBef>
-                <a:spcPct val="0"/>
-              </a:spcBef>
-              <a:spcAft>
-                <a:spcPct val="0"/>
-              </a:spcAft>
-              <a:buClrTx/>
-              <a:buSzTx/>
-              <a:buFontTx/>
-              <a:buNone/>
-              <a:tabLst/>
-            </a:pPr>
-            <a:r>
-              <a:rPr kumimoji="0" lang="en-US" altLang="es-ES" sz="1400" b="0" i="0" u="none" strike="noStrike" cap="none" normalizeH="0" baseline="0" dirty="0">
-                <a:ln>
-                  <a:noFill/>
-                </a:ln>
-                <a:solidFill>
-                  <a:srgbClr val="F4A200"/>
-                </a:solidFill>
-                <a:effectLst/>
-                <a:latin typeface="Arial" panose="020B0604020202020204" pitchFamily="34" charset="0"/>
-                <a:ea typeface="Myriad Pro Light"/>
-                <a:cs typeface="Times New Roman" panose="02020603050405020304" pitchFamily="18" charset="0"/>
-              </a:rPr>
-              <a:t>Universidad </a:t>
-            </a:r>
-            <a:r>
-              <a:rPr kumimoji="0" lang="en-US" altLang="es-ES" sz="1400" b="0" i="0" u="none" strike="noStrike" cap="none" normalizeH="0" baseline="0" dirty="0" err="1">
-                <a:ln>
-                  <a:noFill/>
-                </a:ln>
-                <a:solidFill>
-                  <a:srgbClr val="F4A200"/>
-                </a:solidFill>
-                <a:effectLst/>
-                <a:latin typeface="Arial" panose="020B0604020202020204" pitchFamily="34" charset="0"/>
-                <a:ea typeface="Myriad Pro Light"/>
-                <a:cs typeface="Times New Roman" panose="02020603050405020304" pitchFamily="18" charset="0"/>
-              </a:rPr>
-              <a:t>Aut</a:t>
-            </a:r>
-            <a:r>
-              <a:rPr lang="en-US" altLang="es-ES" sz="1400" dirty="0" err="1">
-                <a:solidFill>
-                  <a:srgbClr val="F4A200"/>
-                </a:solidFill>
-                <a:latin typeface="Arial" panose="020B0604020202020204" pitchFamily="34" charset="0"/>
-                <a:ea typeface="Myriad Pro Light"/>
-                <a:cs typeface="Times New Roman" panose="02020603050405020304" pitchFamily="18" charset="0"/>
-              </a:rPr>
-              <a:t>ó</a:t>
-            </a:r>
-            <a:r>
-              <a:rPr kumimoji="0" lang="en-US" altLang="es-ES" sz="1400" b="0" i="0" u="none" strike="noStrike" cap="none" normalizeH="0" baseline="0" dirty="0" err="1">
-                <a:ln>
-                  <a:noFill/>
-                </a:ln>
-                <a:solidFill>
-                  <a:srgbClr val="F4A200"/>
-                </a:solidFill>
-                <a:effectLst/>
-                <a:latin typeface="Arial" panose="020B0604020202020204" pitchFamily="34" charset="0"/>
-                <a:ea typeface="Myriad Pro Light"/>
-                <a:cs typeface="Times New Roman" panose="02020603050405020304" pitchFamily="18" charset="0"/>
-              </a:rPr>
-              <a:t>noma</a:t>
-            </a:r>
-            <a:r>
-              <a:rPr kumimoji="0" lang="en-US" altLang="es-ES" sz="1400" b="0" i="0" u="none" strike="noStrike" cap="none" normalizeH="0" baseline="0" dirty="0">
-                <a:ln>
-                  <a:noFill/>
-                </a:ln>
-                <a:solidFill>
-                  <a:srgbClr val="F4A200"/>
-                </a:solidFill>
-                <a:effectLst/>
-                <a:latin typeface="Arial" panose="020B0604020202020204" pitchFamily="34" charset="0"/>
-                <a:ea typeface="Myriad Pro Light"/>
-                <a:cs typeface="Times New Roman" panose="02020603050405020304" pitchFamily="18" charset="0"/>
-              </a:rPr>
-              <a:t> de Madrid</a:t>
-            </a:r>
-            <a:endParaRPr kumimoji="0" lang="es-ES" altLang="es-ES" sz="500" b="0" i="0" u="none" strike="noStrike" cap="none" normalizeH="0" baseline="0" dirty="0">
-              <a:ln>
-                <a:noFill/>
-              </a:ln>
-              <a:solidFill>
-                <a:schemeClr val="tx1"/>
-              </a:solidFill>
-              <a:effectLst/>
-              <a:latin typeface="Arial" panose="020B0604020202020204" pitchFamily="34" charset="0"/>
-            </a:endParaRPr>
-          </a:p>
-        </p:txBody>
-      </p:sp>
-    </p:spTree>
-    <p:extLst>
-      <p:ext uri="{BB962C8B-B14F-4D97-AF65-F5344CB8AC3E}">
-        <p14:creationId xmlns:p14="http://schemas.microsoft.com/office/powerpoint/2010/main" val="1559458376"/>
-      </p:ext>
-    </p:extLst>
-  </p:cSld>
-  <p:clrMapOvr>
-    <a:masterClrMapping/>
-  </p:clrMapOvr>
-</p:sld>
-</file>
-
 <file path=ppt/slides/slide2.xml><?xml version="1.0" encoding="utf-8"?>
 <p:sld xmlns:a="http://schemas.openxmlformats.org/drawingml/2006/main" xmlns:r="http://schemas.openxmlformats.org/officeDocument/2006/relationships" xmlns:p="http://schemas.openxmlformats.org/presentationml/2006/main">
   <p:cSld>
@@ -27390,6 +28034,656 @@
 </p:sld>
 </file>
 
+<file path=ppt/slides/slide20.xml><?xml version="1.0" encoding="utf-8"?>
+<p:sld xmlns:a="http://schemas.openxmlformats.org/drawingml/2006/main" xmlns:r="http://schemas.openxmlformats.org/officeDocument/2006/relationships" xmlns:p="http://schemas.openxmlformats.org/presentationml/2006/main">
+  <p:cSld>
+    <p:spTree>
+      <p:nvGrpSpPr>
+        <p:cNvPr id="1" name=""/>
+        <p:cNvGrpSpPr/>
+        <p:nvPr/>
+      </p:nvGrpSpPr>
+      <p:grpSpPr>
+        <a:xfrm>
+          <a:off x="0" y="0"/>
+          <a:ext cx="0" cy="0"/>
+          <a:chOff x="0" y="0"/>
+          <a:chExt cx="0" cy="0"/>
+        </a:xfrm>
+      </p:grpSpPr>
+      <p:sp>
+        <p:nvSpPr>
+          <p:cNvPr id="2" name="Title 1">
+            <a:extLst>
+              <a:ext uri="{FF2B5EF4-FFF2-40B4-BE49-F238E27FC236}">
+                <a16:creationId xmlns:a16="http://schemas.microsoft.com/office/drawing/2014/main" id="{F140273F-00A5-2CDE-5EC1-05720B283B27}"/>
+              </a:ext>
+            </a:extLst>
+          </p:cNvPr>
+          <p:cNvSpPr>
+            <a:spLocks noGrp="1"/>
+          </p:cNvSpPr>
+          <p:nvPr>
+            <p:ph type="title"/>
+          </p:nvPr>
+        </p:nvSpPr>
+        <p:spPr/>
+        <p:txBody>
+          <a:bodyPr>
+            <a:normAutofit/>
+          </a:bodyPr>
+          <a:lstStyle/>
+          <a:p>
+            <a:r>
+              <a:rPr lang="es-ES" sz="4000" dirty="0" err="1"/>
+              <a:t>Take</a:t>
+            </a:r>
+            <a:r>
+              <a:rPr lang="es-ES" sz="4000" dirty="0"/>
+              <a:t>-home </a:t>
+            </a:r>
+            <a:r>
+              <a:rPr lang="es-ES" sz="4000" dirty="0" err="1"/>
+              <a:t>messages</a:t>
+            </a:r>
+            <a:endParaRPr lang="en-US" sz="4000" dirty="0"/>
+          </a:p>
+        </p:txBody>
+      </p:sp>
+      <p:sp>
+        <p:nvSpPr>
+          <p:cNvPr id="3" name="Content Placeholder 2">
+            <a:extLst>
+              <a:ext uri="{FF2B5EF4-FFF2-40B4-BE49-F238E27FC236}">
+                <a16:creationId xmlns:a16="http://schemas.microsoft.com/office/drawing/2014/main" id="{7035E4AA-6F11-BAE1-CC1D-242A88A33FB9}"/>
+              </a:ext>
+            </a:extLst>
+          </p:cNvPr>
+          <p:cNvSpPr>
+            <a:spLocks noGrp="1"/>
+          </p:cNvSpPr>
+          <p:nvPr>
+            <p:ph idx="1"/>
+          </p:nvPr>
+        </p:nvSpPr>
+        <p:spPr/>
+        <p:txBody>
+          <a:bodyPr>
+            <a:normAutofit fontScale="92500" lnSpcReduction="20000"/>
+          </a:bodyPr>
+          <a:lstStyle/>
+          <a:p>
+            <a:pPr>
+              <a:lnSpc>
+                <a:spcPct val="120000"/>
+              </a:lnSpc>
+              <a:buFont typeface="Wingdings" panose="05000000000000000000" pitchFamily="2" charset="2"/>
+              <a:buChar char="§"/>
+            </a:pPr>
+            <a:r>
+              <a:rPr lang="en-US" sz="2000" dirty="0">
+                <a:latin typeface="+mj-lt"/>
+              </a:rPr>
+              <a:t>ML is about making computers getting better at some tasks by </a:t>
+            </a:r>
+            <a:r>
+              <a:rPr lang="en-US" sz="2000" b="1" dirty="0">
+                <a:latin typeface="+mj-lt"/>
+              </a:rPr>
+              <a:t>learning from data </a:t>
+            </a:r>
+            <a:r>
+              <a:rPr lang="en-US" sz="2000" dirty="0">
+                <a:latin typeface="+mj-lt"/>
+              </a:rPr>
+              <a:t>instead of coding specific rules</a:t>
+            </a:r>
+          </a:p>
+          <a:p>
+            <a:pPr>
+              <a:lnSpc>
+                <a:spcPct val="120000"/>
+              </a:lnSpc>
+              <a:buFont typeface="Wingdings" panose="05000000000000000000" pitchFamily="2" charset="2"/>
+              <a:buChar char="§"/>
+            </a:pPr>
+            <a:r>
+              <a:rPr lang="en-US" sz="2000" dirty="0">
+                <a:latin typeface="+mj-lt"/>
+              </a:rPr>
+              <a:t>There are many different ML systems: supervised or not, batch or online, instance-based or model-based</a:t>
+            </a:r>
+          </a:p>
+          <a:p>
+            <a:pPr>
+              <a:lnSpc>
+                <a:spcPct val="120000"/>
+              </a:lnSpc>
+              <a:buFont typeface="Wingdings" panose="05000000000000000000" pitchFamily="2" charset="2"/>
+              <a:buChar char="§"/>
+            </a:pPr>
+            <a:r>
+              <a:rPr lang="en-US" sz="2000" b="1" dirty="0">
+                <a:latin typeface="+mj-lt"/>
+              </a:rPr>
+              <a:t>Non-parametric</a:t>
+            </a:r>
+            <a:r>
+              <a:rPr lang="en-US" sz="2000" dirty="0">
+                <a:latin typeface="+mj-lt"/>
+              </a:rPr>
+              <a:t> models have parameters that cannot be learnt from the data. These methods need to be </a:t>
+            </a:r>
+            <a:r>
+              <a:rPr lang="en-US" sz="2000" b="1" dirty="0">
+                <a:latin typeface="+mj-lt"/>
+              </a:rPr>
+              <a:t>tuned</a:t>
+            </a:r>
+            <a:endParaRPr lang="en-US" sz="2000" dirty="0">
+              <a:latin typeface="+mj-lt"/>
+            </a:endParaRPr>
+          </a:p>
+          <a:p>
+            <a:pPr>
+              <a:lnSpc>
+                <a:spcPct val="120000"/>
+              </a:lnSpc>
+              <a:buFont typeface="Wingdings" panose="05000000000000000000" pitchFamily="2" charset="2"/>
+              <a:buChar char="§"/>
+            </a:pPr>
+            <a:r>
+              <a:rPr lang="en-US" sz="2000" dirty="0">
+                <a:latin typeface="+mj-lt"/>
+              </a:rPr>
+              <a:t>Algorithms learn from a </a:t>
+            </a:r>
+            <a:r>
+              <a:rPr lang="en-US" sz="2000" b="1" dirty="0">
+                <a:latin typeface="+mj-lt"/>
+              </a:rPr>
+              <a:t>training dataset</a:t>
+            </a:r>
+            <a:r>
+              <a:rPr lang="en-US" sz="2000" dirty="0">
+                <a:latin typeface="+mj-lt"/>
+              </a:rPr>
+              <a:t>. They are evaluated </a:t>
+            </a:r>
+            <a:r>
+              <a:rPr lang="en-US" sz="2000">
+                <a:latin typeface="+mj-lt"/>
+              </a:rPr>
+              <a:t>on “new” </a:t>
+            </a:r>
+            <a:r>
+              <a:rPr lang="en-US" sz="2000" dirty="0">
+                <a:latin typeface="+mj-lt"/>
+              </a:rPr>
+              <a:t>data, a </a:t>
+            </a:r>
+            <a:r>
+              <a:rPr lang="en-US" sz="2000" b="1" dirty="0">
+                <a:latin typeface="+mj-lt"/>
+              </a:rPr>
+              <a:t>testing dataset</a:t>
+            </a:r>
+            <a:endParaRPr lang="en-US" sz="2000" dirty="0">
+              <a:latin typeface="+mj-lt"/>
+            </a:endParaRPr>
+          </a:p>
+          <a:p>
+            <a:pPr>
+              <a:lnSpc>
+                <a:spcPct val="120000"/>
+              </a:lnSpc>
+              <a:buFont typeface="Wingdings" panose="05000000000000000000" pitchFamily="2" charset="2"/>
+              <a:buChar char="§"/>
+            </a:pPr>
+            <a:r>
+              <a:rPr lang="en-US" sz="2000" b="1" dirty="0">
+                <a:latin typeface="+mj-lt"/>
+              </a:rPr>
+              <a:t>Flexible </a:t>
+            </a:r>
+            <a:r>
+              <a:rPr lang="en-US" sz="2000" dirty="0">
+                <a:latin typeface="+mj-lt"/>
+              </a:rPr>
+              <a:t>models can adapt better to any data structure but are less </a:t>
+            </a:r>
+            <a:r>
+              <a:rPr lang="en-US" sz="2000" b="1" dirty="0">
+                <a:latin typeface="+mj-lt"/>
+              </a:rPr>
+              <a:t>accurate</a:t>
+            </a:r>
+            <a:r>
+              <a:rPr lang="en-US" sz="2000" dirty="0">
+                <a:latin typeface="+mj-lt"/>
+              </a:rPr>
+              <a:t>. However, less flexible models are more </a:t>
+            </a:r>
+            <a:r>
+              <a:rPr lang="en-US" sz="2000" b="1" dirty="0">
+                <a:latin typeface="+mj-lt"/>
+              </a:rPr>
+              <a:t>interpretable</a:t>
+            </a:r>
+            <a:endParaRPr lang="en-US" sz="2000" dirty="0">
+              <a:latin typeface="+mj-lt"/>
+            </a:endParaRPr>
+          </a:p>
+          <a:p>
+            <a:pPr>
+              <a:lnSpc>
+                <a:spcPct val="120000"/>
+              </a:lnSpc>
+              <a:buFont typeface="Wingdings" panose="05000000000000000000" pitchFamily="2" charset="2"/>
+              <a:buChar char="§"/>
+            </a:pPr>
+            <a:r>
+              <a:rPr lang="en-US" sz="2000" b="1" dirty="0">
+                <a:latin typeface="+mj-lt"/>
+              </a:rPr>
+              <a:t>Variance </a:t>
+            </a:r>
+            <a:r>
+              <a:rPr lang="en-US" sz="2000" dirty="0">
+                <a:latin typeface="+mj-lt"/>
+              </a:rPr>
+              <a:t>in a model is a bad thing, but one cannot reduce it without increasing its </a:t>
+            </a:r>
+            <a:r>
+              <a:rPr lang="en-US" sz="2000" b="1" dirty="0">
+                <a:latin typeface="+mj-lt"/>
+              </a:rPr>
+              <a:t>bias </a:t>
+            </a:r>
+            <a:r>
+              <a:rPr lang="en-US" sz="2000" dirty="0">
+                <a:latin typeface="+mj-lt"/>
+              </a:rPr>
+              <a:t>(making more error)</a:t>
+            </a:r>
+          </a:p>
+          <a:p>
+            <a:pPr>
+              <a:lnSpc>
+                <a:spcPct val="120000"/>
+              </a:lnSpc>
+              <a:buFont typeface="Wingdings" panose="05000000000000000000" pitchFamily="2" charset="2"/>
+              <a:buChar char="§"/>
+            </a:pPr>
+            <a:r>
+              <a:rPr lang="en-US" sz="2000" dirty="0">
+                <a:latin typeface="+mj-lt"/>
+              </a:rPr>
+              <a:t>Challenges in ML practice are mainly related to data, and not that much to the methods</a:t>
+            </a:r>
+          </a:p>
+          <a:p>
+            <a:pPr>
+              <a:lnSpc>
+                <a:spcPct val="120000"/>
+              </a:lnSpc>
+              <a:buFont typeface="Wingdings" panose="05000000000000000000" pitchFamily="2" charset="2"/>
+              <a:buChar char="§"/>
+            </a:pPr>
+            <a:endParaRPr lang="en-US" sz="2000" dirty="0">
+              <a:latin typeface="+mj-lt"/>
+            </a:endParaRPr>
+          </a:p>
+        </p:txBody>
+      </p:sp>
+      <p:sp>
+        <p:nvSpPr>
+          <p:cNvPr id="4" name="Rectángulo 3">
+            <a:extLst>
+              <a:ext uri="{FF2B5EF4-FFF2-40B4-BE49-F238E27FC236}">
+                <a16:creationId xmlns:a16="http://schemas.microsoft.com/office/drawing/2014/main" id="{A1833D6E-EB66-4B08-6A71-A2490E5ED556}"/>
+              </a:ext>
+            </a:extLst>
+          </p:cNvPr>
+          <p:cNvSpPr/>
+          <p:nvPr/>
+        </p:nvSpPr>
+        <p:spPr>
+          <a:xfrm>
+            <a:off x="0" y="0"/>
+            <a:ext cx="374469" cy="6858000"/>
+          </a:xfrm>
+          <a:prstGeom prst="rect">
+            <a:avLst/>
+          </a:prstGeom>
+        </p:spPr>
+        <p:style>
+          <a:lnRef idx="2">
+            <a:schemeClr val="accent2">
+              <a:shade val="50000"/>
+            </a:schemeClr>
+          </a:lnRef>
+          <a:fillRef idx="1">
+            <a:schemeClr val="accent2"/>
+          </a:fillRef>
+          <a:effectRef idx="0">
+            <a:schemeClr val="accent2"/>
+          </a:effectRef>
+          <a:fontRef idx="minor">
+            <a:schemeClr val="lt1"/>
+          </a:fontRef>
+        </p:style>
+        <p:txBody>
+          <a:bodyPr rtlCol="0" anchor="ctr"/>
+          <a:lstStyle/>
+          <a:p>
+            <a:pPr algn="ctr"/>
+            <a:endParaRPr lang="es-ES"/>
+          </a:p>
+        </p:txBody>
+      </p:sp>
+      <p:sp>
+        <p:nvSpPr>
+          <p:cNvPr id="6" name="Rectangle 143">
+            <a:extLst>
+              <a:ext uri="{FF2B5EF4-FFF2-40B4-BE49-F238E27FC236}">
+                <a16:creationId xmlns:a16="http://schemas.microsoft.com/office/drawing/2014/main" id="{E26F5452-61B0-92E2-4D42-12B9B3E30BE5}"/>
+              </a:ext>
+            </a:extLst>
+          </p:cNvPr>
+          <p:cNvSpPr>
+            <a:spLocks noChangeArrowheads="1"/>
+          </p:cNvSpPr>
+          <p:nvPr/>
+        </p:nvSpPr>
+        <p:spPr bwMode="auto">
+          <a:xfrm>
+            <a:off x="448342" y="6401243"/>
+            <a:ext cx="5730175" cy="307777"/>
+          </a:xfrm>
+          <a:prstGeom prst="rect">
+            <a:avLst/>
+          </a:prstGeom>
+          <a:noFill/>
+          <a:ln>
+            <a:noFill/>
+          </a:ln>
+          <a:effectLst/>
+          <a:extLst>
+            <a:ext uri="{909E8E84-426E-40DD-AFC4-6F175D3DCCD1}">
+              <a14:hiddenFill xmlns:a14="http://schemas.microsoft.com/office/drawing/2010/main">
+                <a:solidFill>
+                  <a:schemeClr val="accent1"/>
+                </a:solidFill>
+              </a14:hiddenFill>
+            </a:ext>
+            <a:ext uri="{91240B29-F687-4F45-9708-019B960494DF}">
+              <a14:hiddenLine xmlns:a14="http://schemas.microsoft.com/office/drawing/2010/main" w="9525">
+                <a:solidFill>
+                  <a:schemeClr val="tx1"/>
+                </a:solidFill>
+                <a:miter lim="800000"/>
+                <a:headEnd/>
+                <a:tailEnd/>
+              </a14:hiddenLine>
+            </a:ext>
+            <a:ext uri="{AF507438-7753-43E0-B8FC-AC1667EBCBE1}">
+              <a14:hiddenEffects xmlns:a14="http://schemas.microsoft.com/office/drawing/2010/main">
+                <a:effectLst>
+                  <a:outerShdw dist="35921" dir="2700000" algn="ctr" rotWithShape="0">
+                    <a:schemeClr val="bg2"/>
+                  </a:outerShdw>
+                </a:effectLst>
+              </a14:hiddenEffects>
+            </a:ext>
+          </a:extLst>
+        </p:spPr>
+        <p:txBody>
+          <a:bodyPr vert="horz" wrap="square" lIns="91440" tIns="45720" rIns="91440" bIns="45720" numCol="1" anchor="ctr" anchorCtr="0" compatLnSpc="1">
+            <a:prstTxWarp prst="textNoShape">
+              <a:avLst/>
+            </a:prstTxWarp>
+            <a:spAutoFit/>
+          </a:bodyPr>
+          <a:lstStyle/>
+          <a:p>
+            <a:pPr marL="0" marR="0" lvl="0" indent="0" algn="l" defTabSz="914400" rtl="0" eaLnBrk="0" fontAlgn="base" latinLnBrk="0" hangingPunct="0">
+              <a:lnSpc>
+                <a:spcPct val="100000"/>
+              </a:lnSpc>
+              <a:spcBef>
+                <a:spcPct val="0"/>
+              </a:spcBef>
+              <a:spcAft>
+                <a:spcPct val="0"/>
+              </a:spcAft>
+              <a:buClrTx/>
+              <a:buSzTx/>
+              <a:buFontTx/>
+              <a:buNone/>
+              <a:tabLst/>
+            </a:pPr>
+            <a:r>
+              <a:rPr kumimoji="0" lang="en-US" altLang="es-ES" sz="1400" b="0" i="0" u="none" strike="noStrike" cap="none" normalizeH="0" baseline="0" dirty="0">
+                <a:ln>
+                  <a:noFill/>
+                </a:ln>
+                <a:solidFill>
+                  <a:srgbClr val="F4A200"/>
+                </a:solidFill>
+                <a:effectLst/>
+                <a:latin typeface="Arial" panose="020B0604020202020204" pitchFamily="34" charset="0"/>
+                <a:ea typeface="Myriad Pro Light"/>
+                <a:cs typeface="Times New Roman" panose="02020603050405020304" pitchFamily="18" charset="0"/>
+              </a:rPr>
+              <a:t>Master in Quantitative Economic Analysis </a:t>
+            </a:r>
+            <a:r>
+              <a:rPr kumimoji="0" lang="en-US" altLang="es-ES" sz="1400" b="0" i="0" u="none" strike="noStrike" cap="none" normalizeH="0" baseline="0" dirty="0" err="1">
+                <a:ln>
+                  <a:noFill/>
+                </a:ln>
+                <a:solidFill>
+                  <a:srgbClr val="F4A200"/>
+                </a:solidFill>
+                <a:effectLst/>
+                <a:latin typeface="Arial" panose="020B0604020202020204" pitchFamily="34" charset="0"/>
+                <a:ea typeface="Myriad Pro Light"/>
+                <a:cs typeface="Times New Roman" panose="02020603050405020304" pitchFamily="18" charset="0"/>
+              </a:rPr>
+              <a:t>MQuEA</a:t>
+            </a:r>
+            <a:endParaRPr kumimoji="0" lang="es-ES" altLang="es-ES" sz="500" b="0" i="0" u="none" strike="noStrike" cap="none" normalizeH="0" baseline="0" dirty="0">
+              <a:ln>
+                <a:noFill/>
+              </a:ln>
+              <a:solidFill>
+                <a:schemeClr val="tx1"/>
+              </a:solidFill>
+              <a:effectLst/>
+              <a:latin typeface="Arial" panose="020B0604020202020204" pitchFamily="34" charset="0"/>
+            </a:endParaRPr>
+          </a:p>
+        </p:txBody>
+      </p:sp>
+      <p:sp>
+        <p:nvSpPr>
+          <p:cNvPr id="7" name="Rectangle 143">
+            <a:extLst>
+              <a:ext uri="{FF2B5EF4-FFF2-40B4-BE49-F238E27FC236}">
+                <a16:creationId xmlns:a16="http://schemas.microsoft.com/office/drawing/2014/main" id="{E8592DDF-2019-6158-2EBA-F8DA5D07FB53}"/>
+              </a:ext>
+            </a:extLst>
+          </p:cNvPr>
+          <p:cNvSpPr>
+            <a:spLocks noChangeArrowheads="1"/>
+          </p:cNvSpPr>
+          <p:nvPr/>
+        </p:nvSpPr>
+        <p:spPr bwMode="auto">
+          <a:xfrm>
+            <a:off x="6186394" y="6411881"/>
+            <a:ext cx="5730175" cy="307777"/>
+          </a:xfrm>
+          <a:prstGeom prst="rect">
+            <a:avLst/>
+          </a:prstGeom>
+          <a:noFill/>
+          <a:ln>
+            <a:noFill/>
+          </a:ln>
+          <a:effectLst/>
+          <a:extLst>
+            <a:ext uri="{909E8E84-426E-40DD-AFC4-6F175D3DCCD1}">
+              <a14:hiddenFill xmlns:a14="http://schemas.microsoft.com/office/drawing/2010/main">
+                <a:solidFill>
+                  <a:schemeClr val="accent1"/>
+                </a:solidFill>
+              </a14:hiddenFill>
+            </a:ext>
+            <a:ext uri="{91240B29-F687-4F45-9708-019B960494DF}">
+              <a14:hiddenLine xmlns:a14="http://schemas.microsoft.com/office/drawing/2010/main" w="9525">
+                <a:solidFill>
+                  <a:schemeClr val="tx1"/>
+                </a:solidFill>
+                <a:miter lim="800000"/>
+                <a:headEnd/>
+                <a:tailEnd/>
+              </a14:hiddenLine>
+            </a:ext>
+            <a:ext uri="{AF507438-7753-43E0-B8FC-AC1667EBCBE1}">
+              <a14:hiddenEffects xmlns:a14="http://schemas.microsoft.com/office/drawing/2010/main">
+                <a:effectLst>
+                  <a:outerShdw dist="35921" dir="2700000" algn="ctr" rotWithShape="0">
+                    <a:schemeClr val="bg2"/>
+                  </a:outerShdw>
+                </a:effectLst>
+              </a14:hiddenEffects>
+            </a:ext>
+          </a:extLst>
+        </p:spPr>
+        <p:txBody>
+          <a:bodyPr vert="horz" wrap="square" lIns="91440" tIns="45720" rIns="91440" bIns="45720" numCol="1" anchor="ctr" anchorCtr="0" compatLnSpc="1">
+            <a:prstTxWarp prst="textNoShape">
+              <a:avLst/>
+            </a:prstTxWarp>
+            <a:spAutoFit/>
+          </a:bodyPr>
+          <a:lstStyle/>
+          <a:p>
+            <a:pPr marL="0" marR="0" lvl="0" indent="0" algn="r" defTabSz="914400" rtl="0" eaLnBrk="0" fontAlgn="base" latinLnBrk="0" hangingPunct="0">
+              <a:lnSpc>
+                <a:spcPct val="100000"/>
+              </a:lnSpc>
+              <a:spcBef>
+                <a:spcPct val="0"/>
+              </a:spcBef>
+              <a:spcAft>
+                <a:spcPct val="0"/>
+              </a:spcAft>
+              <a:buClrTx/>
+              <a:buSzTx/>
+              <a:buFontTx/>
+              <a:buNone/>
+              <a:tabLst/>
+            </a:pPr>
+            <a:r>
+              <a:rPr kumimoji="0" lang="en-US" altLang="es-ES" sz="1400" b="0" i="0" u="none" strike="noStrike" cap="none" normalizeH="0" baseline="0" dirty="0">
+                <a:ln>
+                  <a:noFill/>
+                </a:ln>
+                <a:solidFill>
+                  <a:srgbClr val="F4A200"/>
+                </a:solidFill>
+                <a:effectLst/>
+                <a:latin typeface="Arial" panose="020B0604020202020204" pitchFamily="34" charset="0"/>
+                <a:ea typeface="Myriad Pro Light"/>
+                <a:cs typeface="Times New Roman" panose="02020603050405020304" pitchFamily="18" charset="0"/>
+              </a:rPr>
+              <a:t>Universidad </a:t>
+            </a:r>
+            <a:r>
+              <a:rPr kumimoji="0" lang="en-US" altLang="es-ES" sz="1400" b="0" i="0" u="none" strike="noStrike" cap="none" normalizeH="0" baseline="0" dirty="0" err="1">
+                <a:ln>
+                  <a:noFill/>
+                </a:ln>
+                <a:solidFill>
+                  <a:srgbClr val="F4A200"/>
+                </a:solidFill>
+                <a:effectLst/>
+                <a:latin typeface="Arial" panose="020B0604020202020204" pitchFamily="34" charset="0"/>
+                <a:ea typeface="Myriad Pro Light"/>
+                <a:cs typeface="Times New Roman" panose="02020603050405020304" pitchFamily="18" charset="0"/>
+              </a:rPr>
+              <a:t>Aut</a:t>
+            </a:r>
+            <a:r>
+              <a:rPr lang="en-US" altLang="es-ES" sz="1400" dirty="0" err="1">
+                <a:solidFill>
+                  <a:srgbClr val="F4A200"/>
+                </a:solidFill>
+                <a:latin typeface="Arial" panose="020B0604020202020204" pitchFamily="34" charset="0"/>
+                <a:ea typeface="Myriad Pro Light"/>
+                <a:cs typeface="Times New Roman" panose="02020603050405020304" pitchFamily="18" charset="0"/>
+              </a:rPr>
+              <a:t>ó</a:t>
+            </a:r>
+            <a:r>
+              <a:rPr kumimoji="0" lang="en-US" altLang="es-ES" sz="1400" b="0" i="0" u="none" strike="noStrike" cap="none" normalizeH="0" baseline="0" dirty="0" err="1">
+                <a:ln>
+                  <a:noFill/>
+                </a:ln>
+                <a:solidFill>
+                  <a:srgbClr val="F4A200"/>
+                </a:solidFill>
+                <a:effectLst/>
+                <a:latin typeface="Arial" panose="020B0604020202020204" pitchFamily="34" charset="0"/>
+                <a:ea typeface="Myriad Pro Light"/>
+                <a:cs typeface="Times New Roman" panose="02020603050405020304" pitchFamily="18" charset="0"/>
+              </a:rPr>
+              <a:t>noma</a:t>
+            </a:r>
+            <a:r>
+              <a:rPr kumimoji="0" lang="en-US" altLang="es-ES" sz="1400" b="0" i="0" u="none" strike="noStrike" cap="none" normalizeH="0" baseline="0" dirty="0">
+                <a:ln>
+                  <a:noFill/>
+                </a:ln>
+                <a:solidFill>
+                  <a:srgbClr val="F4A200"/>
+                </a:solidFill>
+                <a:effectLst/>
+                <a:latin typeface="Arial" panose="020B0604020202020204" pitchFamily="34" charset="0"/>
+                <a:ea typeface="Myriad Pro Light"/>
+                <a:cs typeface="Times New Roman" panose="02020603050405020304" pitchFamily="18" charset="0"/>
+              </a:rPr>
+              <a:t> de Madrid</a:t>
+            </a:r>
+            <a:endParaRPr kumimoji="0" lang="es-ES" altLang="es-ES" sz="500" b="0" i="0" u="none" strike="noStrike" cap="none" normalizeH="0" baseline="0" dirty="0">
+              <a:ln>
+                <a:noFill/>
+              </a:ln>
+              <a:solidFill>
+                <a:schemeClr val="tx1"/>
+              </a:solidFill>
+              <a:effectLst/>
+              <a:latin typeface="Arial" panose="020B0604020202020204" pitchFamily="34" charset="0"/>
+            </a:endParaRPr>
+          </a:p>
+        </p:txBody>
+      </p:sp>
+    </p:spTree>
+    <p:extLst>
+      <p:ext uri="{BB962C8B-B14F-4D97-AF65-F5344CB8AC3E}">
+        <p14:creationId xmlns:p14="http://schemas.microsoft.com/office/powerpoint/2010/main" val="1559458376"/>
+      </p:ext>
+    </p:extLst>
+  </p:cSld>
+  <p:clrMapOvr>
+    <a:masterClrMapping/>
+  </p:clrMapOvr>
+</p:sld>
+</file>
+
 <file path=ppt/slides/slide3.xml><?xml version="1.0" encoding="utf-8"?>
 <p:sld xmlns:a="http://schemas.openxmlformats.org/drawingml/2006/main" xmlns:r="http://schemas.openxmlformats.org/officeDocument/2006/relationships" xmlns:p="http://schemas.openxmlformats.org/presentationml/2006/main">
   <p:cSld>
@@ -27486,7 +28780,7 @@
               <a:rPr lang="en-US" sz="2400" dirty="0">
                 <a:latin typeface="+mj-lt"/>
               </a:rPr>
-              <a:t>Can you name four problems where it shines?</a:t>
+              <a:t>Can you name four problems where it can be applied?</a:t>
             </a:r>
           </a:p>
           <a:p>
@@ -27531,7 +28825,7 @@
               <a:rPr lang="en-US" sz="2400" dirty="0">
                 <a:latin typeface="+mj-lt"/>
               </a:rPr>
-              <a:t>What type of ML algorithm you would use to allow a robot walk in various unknown terrains?</a:t>
+              <a:t>What type of ML algorithm would you use to allow a robot walk in various unknown terrains?</a:t>
             </a:r>
           </a:p>
           <a:p>
@@ -27546,7 +28840,7 @@
               <a:rPr lang="en-US" sz="2400" dirty="0">
                 <a:latin typeface="+mj-lt"/>
               </a:rPr>
-              <a:t>What type of ML algorithm you would use to segment your customers into multiple groups?</a:t>
+              <a:t>What type of ML algorithm would you use to segment your customers into multiple groups?</a:t>
             </a:r>
           </a:p>
           <a:p>
@@ -27977,7 +29271,7 @@
         <p:spPr/>
         <p:txBody>
           <a:bodyPr>
-            <a:normAutofit fontScale="92500" lnSpcReduction="20000"/>
+            <a:normAutofit/>
           </a:bodyPr>
           <a:lstStyle/>
           <a:p>
@@ -28022,7 +29316,7 @@
               <a:rPr lang="en-US" sz="2400" dirty="0">
                 <a:latin typeface="+mj-lt"/>
               </a:rPr>
-              <a:t>Can you name four of the main challenges in Machine Learning?</a:t>
+              <a:t>Can you name three main challenges in Machine Learning?</a:t>
             </a:r>
           </a:p>
           <a:p>
@@ -28048,12 +29342,9 @@
               <a:buFont typeface="+mj-lt"/>
               <a:buAutoNum type="arabicPeriod" startAt="7"/>
             </a:pPr>
-            <a:r>
-              <a:rPr lang="en-US" sz="2400" dirty="0">
-                <a:latin typeface="+mj-lt"/>
-              </a:rPr>
-              <a:t>What is a test set?</a:t>
-            </a:r>
+            <a:endParaRPr lang="en-US" sz="2400" dirty="0">
+              <a:latin typeface="+mj-lt"/>
+            </a:endParaRPr>
           </a:p>
           <a:p>
             <a:pPr marL="514350" indent="-514350">
@@ -30047,7 +31338,7 @@
         <p:spPr/>
         <p:txBody>
           <a:bodyPr>
-            <a:normAutofit lnSpcReduction="10000"/>
+            <a:normAutofit fontScale="92500" lnSpcReduction="20000"/>
           </a:bodyPr>
           <a:lstStyle/>
           <a:p>
@@ -30059,13 +31350,13 @@
               <a:buChar char="§"/>
             </a:pPr>
             <a:r>
-              <a:rPr lang="en-US" sz="2400" dirty="0">
+              <a:rPr lang="en-US" dirty="0">
                 <a:latin typeface="+mj-lt"/>
               </a:rPr>
               <a:t>Whether or not they are trained knowing the </a:t>
             </a:r>
             <a:r>
-              <a:rPr lang="en-US" sz="2400" i="1" dirty="0">
+              <a:rPr lang="en-US" i="1" dirty="0">
                 <a:latin typeface="+mj-lt"/>
               </a:rPr>
               <a:t>labels</a:t>
@@ -30080,13 +31371,13 @@
               <a:buChar char="§"/>
             </a:pPr>
             <a:r>
-              <a:rPr lang="en-US" sz="2000" b="1" dirty="0">
+              <a:rPr lang="en-US" b="1" dirty="0">
                 <a:latin typeface="+mj-lt"/>
               </a:rPr>
               <a:t>Supervised learning </a:t>
             </a:r>
             <a:r>
-              <a:rPr lang="en-US" sz="2000" dirty="0">
+              <a:rPr lang="en-US" dirty="0">
                 <a:latin typeface="+mj-lt"/>
               </a:rPr>
               <a:t>(k-NN, Linear or Logistic regressions, SVM, DT and RF, NN…)</a:t>
@@ -30101,13 +31392,13 @@
               <a:buChar char="§"/>
             </a:pPr>
             <a:r>
-              <a:rPr lang="en-US" sz="2000" b="1" dirty="0">
+              <a:rPr lang="en-US" b="1" dirty="0">
                 <a:latin typeface="+mj-lt"/>
               </a:rPr>
               <a:t>Unsupervised learning </a:t>
             </a:r>
             <a:r>
-              <a:rPr lang="en-US" sz="2000" dirty="0">
+              <a:rPr lang="en-US" dirty="0">
                 <a:latin typeface="+mj-lt"/>
               </a:rPr>
               <a:t>(k-Means, PCA…)</a:t>
@@ -30122,7 +31413,7 @@
               <a:buChar char="§"/>
             </a:pPr>
             <a:r>
-              <a:rPr lang="en-US" sz="2000" dirty="0">
+              <a:rPr lang="en-US" dirty="0">
                 <a:latin typeface="+mj-lt"/>
               </a:rPr>
               <a:t>Semi-supervised learning (partially labeled)</a:t>
@@ -30137,7 +31428,7 @@
               <a:buChar char="§"/>
             </a:pPr>
             <a:r>
-              <a:rPr lang="en-US" sz="2000" dirty="0">
+              <a:rPr lang="en-US" dirty="0">
                 <a:latin typeface="+mj-lt"/>
               </a:rPr>
               <a:t>Reinforcement learning (the algorithm gets rewards/penalties)</a:t>
@@ -30152,7 +31443,7 @@
               <a:buChar char="§"/>
             </a:pPr>
             <a:r>
-              <a:rPr lang="en-US" sz="2400" dirty="0">
+              <a:rPr lang="en-US" dirty="0">
                 <a:latin typeface="+mj-lt"/>
               </a:rPr>
               <a:t>Whether or not they learn on the fly</a:t>
@@ -30167,7 +31458,7 @@
               <a:buChar char="§"/>
             </a:pPr>
             <a:r>
-              <a:rPr lang="en-US" sz="2000" dirty="0">
+              <a:rPr lang="en-US" dirty="0">
                 <a:latin typeface="+mj-lt"/>
               </a:rPr>
               <a:t>Online learning</a:t>
@@ -30182,7 +31473,7 @@
               <a:buChar char="§"/>
             </a:pPr>
             <a:r>
-              <a:rPr lang="en-US" sz="2000" dirty="0">
+              <a:rPr lang="en-US" dirty="0">
                 <a:latin typeface="+mj-lt"/>
               </a:rPr>
               <a:t>Batch learning</a:t>
@@ -30624,13 +31915,13 @@
               <a:rPr lang="en-US" sz="2400" dirty="0">
                 <a:latin typeface="+mj-lt"/>
               </a:rPr>
-              <a:t>What makes a model ‘good’? Quality of </a:t>
+              <a:t>What makes a model ‘good’? </a:t>
             </a:r>
             <a:r>
               <a:rPr lang="en-US" sz="2400" b="1" dirty="0">
                 <a:latin typeface="+mj-lt"/>
               </a:rPr>
-              <a:t>fit</a:t>
+              <a:t>Fit</a:t>
             </a:r>
             <a:r>
               <a:rPr lang="en-US" sz="2400" dirty="0">
@@ -30675,7 +31966,7 @@
               <a:rPr lang="en-US" sz="2400" dirty="0">
                 <a:latin typeface="+mj-lt"/>
               </a:rPr>
-              <a:t>, we could not know if it is actually good; it might be in that particular dataset, but what about when we receive more data? What about in the real word? </a:t>
+              <a:t>, we could not know if it is actually good. It might be in that particular dataset, but what about when we receive more data? What about in the real word? </a:t>
             </a:r>
           </a:p>
           <a:p>
@@ -30696,7 +31987,13 @@
               <a:rPr lang="en-US" sz="2400" b="1" dirty="0">
                 <a:latin typeface="+mj-lt"/>
               </a:rPr>
-              <a:t>a model is not good because it fits some data well, it is good because that model, which has been trained with those data, is also good when applied to totally new information that was not used for training it</a:t>
+              <a:t>a model is not good because it fits some data well, it is good because that model, which has been trained with those data, </a:t>
+            </a:r>
+            <a:r>
+              <a:rPr lang="en-US" sz="2400" b="1" u="sng" dirty="0">
+                <a:latin typeface="+mj-lt"/>
+              </a:rPr>
+              <a:t>is also good when applied to totally new information that was not used for training it</a:t>
             </a:r>
             <a:r>
               <a:rPr lang="en-US" sz="2400" dirty="0">

--- a/Course content/Slides/Topic 1 What is ML.pptx
+++ b/Course content/Slides/Topic 1 What is ML.pptx
@@ -142,16 +142,32 @@
 </p:presentation>
 </file>
 
-<file path=ppt/revisionInfo.xml><?xml version="1.0" encoding="utf-8"?>
-<p1510:revInfo xmlns:a="http://schemas.openxmlformats.org/drawingml/2006/main" xmlns:r="http://schemas.openxmlformats.org/officeDocument/2006/relationships" xmlns:p1510="http://schemas.microsoft.com/office/powerpoint/2015/10/main">
-  <p1510:revLst>
-    <p1510:client id="{F8F14039-D26C-478B-A3B6-430B35B74BC5}" v="4" dt="2023-10-20T16:41:56.826"/>
-  </p1510:revLst>
-</p1510:revInfo>
-</file>
-
 <file path=ppt/changesInfos/changesInfo1.xml><?xml version="1.0" encoding="utf-8"?>
 <pc:chgInfo xmlns:a="http://schemas.openxmlformats.org/drawingml/2006/main" xmlns:r="http://schemas.openxmlformats.org/officeDocument/2006/relationships" xmlns:ac="http://schemas.microsoft.com/office/drawing/2013/main/command" xmlns:pc="http://schemas.microsoft.com/office/powerpoint/2013/main/command">
+  <pc:docChgLst>
+    <pc:chgData name="Javier Bas Vicente" userId="96bf8a96-3310-496c-8c7e-8a087f977faa" providerId="ADAL" clId="{E8FBC8B5-4C40-46BF-9D71-F1AE583FC5BE}"/>
+    <pc:docChg chg="modSld">
+      <pc:chgData name="Javier Bas Vicente" userId="96bf8a96-3310-496c-8c7e-8a087f977faa" providerId="ADAL" clId="{E8FBC8B5-4C40-46BF-9D71-F1AE583FC5BE}" dt="2024-10-19T16:57:22.744" v="1" actId="20577"/>
+      <pc:docMkLst>
+        <pc:docMk/>
+      </pc:docMkLst>
+      <pc:sldChg chg="modSp mod">
+        <pc:chgData name="Javier Bas Vicente" userId="96bf8a96-3310-496c-8c7e-8a087f977faa" providerId="ADAL" clId="{E8FBC8B5-4C40-46BF-9D71-F1AE583FC5BE}" dt="2024-10-19T16:57:22.744" v="1" actId="20577"/>
+        <pc:sldMkLst>
+          <pc:docMk/>
+          <pc:sldMk cId="2149080833" sldId="278"/>
+        </pc:sldMkLst>
+        <pc:spChg chg="mod">
+          <ac:chgData name="Javier Bas Vicente" userId="96bf8a96-3310-496c-8c7e-8a087f977faa" providerId="ADAL" clId="{E8FBC8B5-4C40-46BF-9D71-F1AE583FC5BE}" dt="2024-10-19T16:57:22.744" v="1" actId="20577"/>
+          <ac:spMkLst>
+            <pc:docMk/>
+            <pc:sldMk cId="2149080833" sldId="278"/>
+            <ac:spMk id="3" creationId="{6866AA87-E000-52D2-F65D-4B414B00BBE5}"/>
+          </ac:spMkLst>
+        </pc:spChg>
+      </pc:sldChg>
+    </pc:docChg>
+  </pc:docChgLst>
   <pc:docChgLst>
     <pc:chgData name="Javier Bas Vicente" userId="96bf8a96-3310-496c-8c7e-8a087f977faa" providerId="ADAL" clId="{F8F14039-D26C-478B-A3B6-430B35B74BC5}"/>
     <pc:docChg chg="undo custSel addSld delSld modSld">
@@ -584,7 +600,7 @@
           <a:p>
             <a:fld id="{A7DB5662-7327-465C-9A70-AD96B7A8D67A}" type="datetimeFigureOut">
               <a:rPr lang="en-US" smtClean="0"/>
-              <a:t>10/20/2023</a:t>
+              <a:t>10/19/2024</a:t>
             </a:fld>
             <a:endParaRPr lang="en-US"/>
           </a:p>
@@ -782,7 +798,7 @@
           <a:p>
             <a:fld id="{A7DB5662-7327-465C-9A70-AD96B7A8D67A}" type="datetimeFigureOut">
               <a:rPr lang="en-US" smtClean="0"/>
-              <a:t>10/20/2023</a:t>
+              <a:t>10/19/2024</a:t>
             </a:fld>
             <a:endParaRPr lang="en-US"/>
           </a:p>
@@ -990,7 +1006,7 @@
           <a:p>
             <a:fld id="{A7DB5662-7327-465C-9A70-AD96B7A8D67A}" type="datetimeFigureOut">
               <a:rPr lang="en-US" smtClean="0"/>
-              <a:t>10/20/2023</a:t>
+              <a:t>10/19/2024</a:t>
             </a:fld>
             <a:endParaRPr lang="en-US"/>
           </a:p>
@@ -1188,7 +1204,7 @@
           <a:p>
             <a:fld id="{A7DB5662-7327-465C-9A70-AD96B7A8D67A}" type="datetimeFigureOut">
               <a:rPr lang="en-US" smtClean="0"/>
-              <a:t>10/20/2023</a:t>
+              <a:t>10/19/2024</a:t>
             </a:fld>
             <a:endParaRPr lang="en-US"/>
           </a:p>
@@ -1463,7 +1479,7 @@
           <a:p>
             <a:fld id="{A7DB5662-7327-465C-9A70-AD96B7A8D67A}" type="datetimeFigureOut">
               <a:rPr lang="en-US" smtClean="0"/>
-              <a:t>10/20/2023</a:t>
+              <a:t>10/19/2024</a:t>
             </a:fld>
             <a:endParaRPr lang="en-US"/>
           </a:p>
@@ -1728,7 +1744,7 @@
           <a:p>
             <a:fld id="{A7DB5662-7327-465C-9A70-AD96B7A8D67A}" type="datetimeFigureOut">
               <a:rPr lang="en-US" smtClean="0"/>
-              <a:t>10/20/2023</a:t>
+              <a:t>10/19/2024</a:t>
             </a:fld>
             <a:endParaRPr lang="en-US"/>
           </a:p>
@@ -2140,7 +2156,7 @@
           <a:p>
             <a:fld id="{A7DB5662-7327-465C-9A70-AD96B7A8D67A}" type="datetimeFigureOut">
               <a:rPr lang="en-US" smtClean="0"/>
-              <a:t>10/20/2023</a:t>
+              <a:t>10/19/2024</a:t>
             </a:fld>
             <a:endParaRPr lang="en-US"/>
           </a:p>
@@ -2281,7 +2297,7 @@
           <a:p>
             <a:fld id="{A7DB5662-7327-465C-9A70-AD96B7A8D67A}" type="datetimeFigureOut">
               <a:rPr lang="en-US" smtClean="0"/>
-              <a:t>10/20/2023</a:t>
+              <a:t>10/19/2024</a:t>
             </a:fld>
             <a:endParaRPr lang="en-US"/>
           </a:p>
@@ -2394,7 +2410,7 @@
           <a:p>
             <a:fld id="{A7DB5662-7327-465C-9A70-AD96B7A8D67A}" type="datetimeFigureOut">
               <a:rPr lang="en-US" smtClean="0"/>
-              <a:t>10/20/2023</a:t>
+              <a:t>10/19/2024</a:t>
             </a:fld>
             <a:endParaRPr lang="en-US"/>
           </a:p>
@@ -2705,7 +2721,7 @@
           <a:p>
             <a:fld id="{A7DB5662-7327-465C-9A70-AD96B7A8D67A}" type="datetimeFigureOut">
               <a:rPr lang="en-US" smtClean="0"/>
-              <a:t>10/20/2023</a:t>
+              <a:t>10/19/2024</a:t>
             </a:fld>
             <a:endParaRPr lang="en-US"/>
           </a:p>
@@ -2993,7 +3009,7 @@
           <a:p>
             <a:fld id="{A7DB5662-7327-465C-9A70-AD96B7A8D67A}" type="datetimeFigureOut">
               <a:rPr lang="en-US" smtClean="0"/>
-              <a:t>10/20/2023</a:t>
+              <a:t>10/19/2024</a:t>
             </a:fld>
             <a:endParaRPr lang="en-US"/>
           </a:p>
@@ -3234,7 +3250,7 @@
           <a:p>
             <a:fld id="{A7DB5662-7327-465C-9A70-AD96B7A8D67A}" type="datetimeFigureOut">
               <a:rPr lang="en-US" smtClean="0"/>
-              <a:t>10/20/2023</a:t>
+              <a:t>10/19/2024</a:t>
             </a:fld>
             <a:endParaRPr lang="en-US"/>
           </a:p>
@@ -3781,14 +3797,7 @@
             </a:r>
           </a:p>
           <a:p>
-            <a:r>
-              <a:rPr lang="es-ES" sz="2000" dirty="0">
-                <a:latin typeface="+mj-lt"/>
-                <a:cs typeface="Times New Roman" panose="02020603050405020304" pitchFamily="18" charset="0"/>
-              </a:rPr>
-              <a:t>2023/2024</a:t>
-            </a:r>
-            <a:endParaRPr lang="en-US" sz="2000" dirty="0">
+            <a:endParaRPr lang="es-ES" sz="2000" dirty="0">
               <a:latin typeface="+mj-lt"/>
               <a:cs typeface="Times New Roman" panose="02020603050405020304" pitchFamily="18" charset="0"/>
             </a:endParaRPr>
